--- a/assets/pipeline_figure18.pptx
+++ b/assets/pipeline_figure18.pptx
@@ -4,15 +4,14 @@
   <p:sldMasterIdLst>
     <p:sldMasterId id="2147483648" r:id="rId1"/>
   </p:sldMasterIdLst>
+  <p:notesMasterIdLst>
+    <p:notesMasterId r:id="rId3"/>
+  </p:notesMasterIdLst>
   <p:sldIdLst>
     <p:sldId id="256" r:id="rId2"/>
-    <p:sldId id="257" r:id="rId3"/>
   </p:sldIdLst>
-  <p:notesMasterIdLst>
-    <p:notesMasterId r:id="rId4"/>
-  </p:notesMasterIdLst>
-  <p:sldSz cx="9633397" cy="12863513"/>
-  <p:notesSz cx="12863513" cy="9633397"/>
+  <p:sldSz cx="9632950" cy="12863513"/>
+  <p:notesSz cx="12863513" cy="9632950"/>
   <p:defaultTextStyle>
     <a:lvl1pPr marL="0" algn="l" defTabSz="914400" rtl="0" eaLnBrk="1" latinLnBrk="0" hangingPunct="1">
       <a:defRPr sz="1800" kern="1200">
@@ -105,6 +104,11 @@
       </a:defRPr>
     </a:lvl9pPr>
   </p:defaultTextStyle>
+  <p:extLst>
+    <p:ext uri="{EFAFB233-063F-42B5-8137-9DF3F51BA10A}">
+      <p15:sldGuideLst xmlns:p15="http://schemas.microsoft.com/office/powerpoint/2012/main"/>
+    </p:ext>
+  </p:extLst>
 </p:presentation>
 </file>
 
@@ -130,234 +134,10 @@
           <a:chExt cx="0" cy="0"/>
         </a:xfrm>
       </p:grpSpPr>
-      <p:sp>
-        <p:nvSpPr>
-          <p:cNvPr id="2" name="Header Placeholder 1"/>
-          <p:cNvSpPr>
-            <a:spLocks noGrp="1"/>
-          </p:cNvSpPr>
-          <p:nvPr>
-            <p:ph type="hdr" sz="quarter"/>
-          </p:nvPr>
-        </p:nvSpPr>
-        <p:spPr>
-          <a:xfrm>
-            <a:off x="0" y="0"/>
-            <a:ext cx="2971800" cy="458788"/>
-          </a:xfrm>
-          <a:prstGeom prst="rect">
-            <a:avLst/>
-          </a:prstGeom>
-        </p:spPr>
-        <p:txBody>
-          <a:bodyPr vert="horz" lIns="91440" tIns="45720" rIns="91440" bIns="45720" rtlCol="0"/>
-          <a:lstStyle>
-            <a:lvl1pPr algn="l">
-              <a:defRPr sz="1200"/>
-            </a:lvl1pPr>
-          </a:lstStyle>
-          <a:p>
-            <a:endParaRPr lang="en-US"/>
-          </a:p>
-        </p:txBody>
-      </p:sp>
-      <p:sp>
-        <p:nvSpPr>
-          <p:cNvPr id="3" name="Date Placeholder 2"/>
-          <p:cNvSpPr>
-            <a:spLocks noGrp="1"/>
-          </p:cNvSpPr>
-          <p:nvPr>
-            <p:ph type="dt" idx="1"/>
-          </p:nvPr>
-        </p:nvSpPr>
-        <p:spPr>
-          <a:xfrm>
-            <a:off x="3884613" y="0"/>
-            <a:ext cx="2971800" cy="458788"/>
-          </a:xfrm>
-          <a:prstGeom prst="rect">
-            <a:avLst/>
-          </a:prstGeom>
-        </p:spPr>
-        <p:txBody>
-          <a:bodyPr vert="horz" lIns="91440" tIns="45720" rIns="91440" bIns="45720" rtlCol="0"/>
-          <a:lstStyle>
-            <a:lvl1pPr algn="r">
-              <a:defRPr sz="1200"/>
-            </a:lvl1pPr>
-          </a:lstStyle>
-          <a:p>
-            <a:fld id="{5282F153-3F37-0F45-9E97-73ACFA13230C}" type="datetimeFigureOut">
-              <a:rPr lang="en-US"/>
-              <a:t>7/23/19</a:t>
-            </a:fld>
-            <a:endParaRPr lang="en-US"/>
-          </a:p>
-        </p:txBody>
-      </p:sp>
-      <p:sp>
-        <p:nvSpPr>
-          <p:cNvPr id="4" name="Slide Image Placeholder 3"/>
-          <p:cNvSpPr>
-            <a:spLocks noGrp="1" noRot="1" noChangeAspect="1"/>
-          </p:cNvSpPr>
-          <p:nvPr>
-            <p:ph type="sldImg" idx="2"/>
-          </p:nvPr>
-        </p:nvSpPr>
-        <p:spPr>
-          <a:xfrm>
-            <a:off x="685800" y="1143000"/>
-            <a:ext cx="5486400" cy="3086100"/>
-          </a:xfrm>
-          <a:prstGeom prst="rect">
-            <a:avLst/>
-          </a:prstGeom>
-          <a:noFill/>
-          <a:ln w="12700">
-            <a:solidFill>
-              <a:prstClr val="black"/>
-            </a:solidFill>
-          </a:ln>
-        </p:spPr>
-        <p:txBody>
-          <a:bodyPr vert="horz" lIns="91440" tIns="45720" rIns="91440" bIns="45720" rtlCol="0" anchor="ctr"/>
-          <a:lstStyle/>
-          <a:p>
-            <a:endParaRPr lang="en-US"/>
-          </a:p>
-        </p:txBody>
-      </p:sp>
-      <p:sp>
-        <p:nvSpPr>
-          <p:cNvPr id="5" name="Notes Placeholder 4"/>
-          <p:cNvSpPr>
-            <a:spLocks noGrp="1"/>
-          </p:cNvSpPr>
-          <p:nvPr>
-            <p:ph type="body" sz="quarter" idx="3"/>
-          </p:nvPr>
-        </p:nvSpPr>
-        <p:spPr>
-          <a:xfrm>
-            <a:off x="685800" y="4400550"/>
-            <a:ext cx="5486400" cy="3600450"/>
-          </a:xfrm>
-          <a:prstGeom prst="rect">
-            <a:avLst/>
-          </a:prstGeom>
-        </p:spPr>
-        <p:txBody>
-          <a:bodyPr vert="horz" lIns="91440" tIns="45720" rIns="91440" bIns="45720" rtlCol="0"/>
-          <a:lstStyle/>
-          <a:p>
-            <a:pPr lvl="0"/>
-            <a:r>
-              <a:rPr lang="en-US"/>
-              <a:t>Click to edit Master text styles</a:t>
-            </a:r>
-          </a:p>
-          <a:p>
-            <a:pPr lvl="1"/>
-            <a:r>
-              <a:rPr lang="en-US"/>
-              <a:t>Second level</a:t>
-            </a:r>
-          </a:p>
-          <a:p>
-            <a:pPr lvl="2"/>
-            <a:r>
-              <a:rPr lang="en-US"/>
-              <a:t>Third level</a:t>
-            </a:r>
-          </a:p>
-          <a:p>
-            <a:pPr lvl="3"/>
-            <a:r>
-              <a:rPr lang="en-US"/>
-              <a:t>Fourth level</a:t>
-            </a:r>
-          </a:p>
-          <a:p>
-            <a:pPr lvl="4"/>
-            <a:r>
-              <a:rPr lang="en-US"/>
-              <a:t>Fifth level</a:t>
-            </a:r>
-          </a:p>
-        </p:txBody>
-      </p:sp>
-      <p:sp>
-        <p:nvSpPr>
-          <p:cNvPr id="6" name="Footer Placeholder 5"/>
-          <p:cNvSpPr>
-            <a:spLocks noGrp="1"/>
-          </p:cNvSpPr>
-          <p:nvPr>
-            <p:ph type="ftr" sz="quarter" idx="4"/>
-          </p:nvPr>
-        </p:nvSpPr>
-        <p:spPr>
-          <a:xfrm>
-            <a:off x="0" y="8685213"/>
-            <a:ext cx="2971800" cy="458787"/>
-          </a:xfrm>
-          <a:prstGeom prst="rect">
-            <a:avLst/>
-          </a:prstGeom>
-        </p:spPr>
-        <p:txBody>
-          <a:bodyPr vert="horz" lIns="91440" tIns="45720" rIns="91440" bIns="45720" rtlCol="0" anchor="b"/>
-          <a:lstStyle>
-            <a:lvl1pPr algn="l">
-              <a:defRPr sz="1200"/>
-            </a:lvl1pPr>
-          </a:lstStyle>
-          <a:p>
-            <a:endParaRPr lang="en-US"/>
-          </a:p>
-        </p:txBody>
-      </p:sp>
-      <p:sp>
-        <p:nvSpPr>
-          <p:cNvPr id="7" name="Slide Number Placeholder 6"/>
-          <p:cNvSpPr>
-            <a:spLocks noGrp="1"/>
-          </p:cNvSpPr>
-          <p:nvPr>
-            <p:ph type="sldNum" sz="quarter" idx="5"/>
-          </p:nvPr>
-        </p:nvSpPr>
-        <p:spPr>
-          <a:xfrm>
-            <a:off x="3884613" y="8685213"/>
-            <a:ext cx="2971800" cy="458787"/>
-          </a:xfrm>
-          <a:prstGeom prst="rect">
-            <a:avLst/>
-          </a:prstGeom>
-        </p:spPr>
-        <p:txBody>
-          <a:bodyPr vert="horz" lIns="91440" tIns="45720" rIns="91440" bIns="45720" rtlCol="0" anchor="b"/>
-          <a:lstStyle>
-            <a:lvl1pPr algn="r">
-              <a:defRPr sz="1200"/>
-            </a:lvl1pPr>
-          </a:lstStyle>
-          <a:p>
-            <a:fld id="{CE5E9CC1-C706-0F49-92D6-E571CC5EEA8F}" type="slidenum">
-              <a:rPr lang="en-US"/>
-              <a:t>‹#›</a:t>
-            </a:fld>
-            <a:endParaRPr lang="en-US"/>
-          </a:p>
-        </p:txBody>
-      </p:sp>
     </p:spTree>
     <p:extLst>
       <p:ext uri="{BB962C8B-B14F-4D97-AF65-F5344CB8AC3E}">
-        <p14:creationId xmlns:p14="http://schemas.microsoft.com/office/powerpoint/2010/main" val="1024086991"/>
+        <p14:creationId xmlns:p14="http://schemas.microsoft.com/office/powerpoint/2010/main" val="654138935"/>
       </p:ext>
     </p:extLst>
   </p:cSld>
@@ -501,10 +281,6 @@
           <a:bodyPr/>
           <a:lstStyle/>
           <a:p>
-            <a:r>
-              <a:rPr lang="en-US" dirty="0"/>
-              <a:t/>
-            </a:r>
             <a:endParaRPr lang="en-US" dirty="0"/>
           </a:p>
         </p:txBody>
@@ -527,94 +303,6 @@
             <a:fld id="{F7021451-1387-4CA6-816F-3879F97B5CBC}" type="slidenum">
               <a:rPr lang="en-US"/>
               <a:t>1</a:t>
-            </a:fld>
-            <a:endParaRPr lang="en-US"/>
-          </a:p>
-        </p:txBody>
-      </p:sp>
-    </p:spTree>
-    <p:extLst>
-      <p:ext uri="{BB962C8B-B14F-4D97-AF65-F5344CB8AC3E}">
-        <p14:creationId xmlns:p14="http://schemas.microsoft.com/office/powerpoint/2010/main" val="1024086991"/>
-      </p:ext>
-    </p:extLst>
-  </p:cSld>
-  <p:clrMapOvr>
-    <a:masterClrMapping/>
-  </p:clrMapOvr>
-</p:notes>
-</file>
-
-<file path=ppt/notesSlides/notesSlide2.xml><?xml version="1.0" encoding="utf-8"?>
-<p:notes xmlns:a="http://schemas.openxmlformats.org/drawingml/2006/main" xmlns:r="http://schemas.openxmlformats.org/officeDocument/2006/relationships" xmlns:p="http://schemas.openxmlformats.org/presentationml/2006/main">
-  <p:cSld>
-    <p:spTree>
-      <p:nvGrpSpPr>
-        <p:cNvPr id="1" name=""/>
-        <p:cNvGrpSpPr/>
-        <p:nvPr/>
-      </p:nvGrpSpPr>
-      <p:grpSpPr>
-        <a:xfrm>
-          <a:off x="0" y="0"/>
-          <a:ext cx="0" cy="0"/>
-          <a:chOff x="0" y="0"/>
-          <a:chExt cx="0" cy="0"/>
-        </a:xfrm>
-      </p:grpSpPr>
-      <p:sp>
-        <p:nvSpPr>
-          <p:cNvPr id="2" name="Slide Image Placeholder 1"/>
-          <p:cNvSpPr>
-            <a:spLocks noGrp="1" noRot="1" noChangeAspect="1"/>
-          </p:cNvSpPr>
-          <p:nvPr>
-            <p:ph type="sldImg"/>
-          </p:nvPr>
-        </p:nvSpPr>
-        <p:spPr/>
-      </p:sp>
-      <p:sp>
-        <p:nvSpPr>
-          <p:cNvPr id="3" name="Notes Placeholder 2"/>
-          <p:cNvSpPr>
-            <a:spLocks noGrp="1"/>
-          </p:cNvSpPr>
-          <p:nvPr>
-            <p:ph type="body" idx="1"/>
-          </p:nvPr>
-        </p:nvSpPr>
-        <p:spPr/>
-        <p:txBody>
-          <a:bodyPr/>
-          <a:lstStyle/>
-          <a:p>
-            <a:r>
-              <a:rPr lang="en-US" dirty="0"/>
-              <a:t/>
-            </a:r>
-            <a:endParaRPr lang="en-US" dirty="0"/>
-          </a:p>
-        </p:txBody>
-      </p:sp>
-      <p:sp>
-        <p:nvSpPr>
-          <p:cNvPr id="4" name="Slide Number Placeholder 3"/>
-          <p:cNvSpPr>
-            <a:spLocks noGrp="1"/>
-          </p:cNvSpPr>
-          <p:nvPr>
-            <p:ph type="sldNum" sz="quarter" idx="10"/>
-          </p:nvPr>
-        </p:nvSpPr>
-        <p:spPr/>
-        <p:txBody>
-          <a:bodyPr/>
-          <a:lstStyle/>
-          <a:p>
-            <a:fld id="{F7021451-1387-4CA6-816F-3879F97B5CBC}" type="slidenum">
-              <a:rPr lang="en-US"/>
-              <a:t>2</a:t>
             </a:fld>
             <a:endParaRPr lang="en-US"/>
           </a:p>
@@ -666,6 +354,11 @@
 <file path=ppt/slideMasters/slideMaster1.xml><?xml version="1.0" encoding="utf-8"?>
 <p:sldMaster xmlns:a="http://schemas.openxmlformats.org/drawingml/2006/main" xmlns:r="http://schemas.openxmlformats.org/officeDocument/2006/relationships" xmlns:p="http://schemas.openxmlformats.org/presentationml/2006/main">
   <p:cSld>
+    <p:bg>
+      <p:bgRef idx="1001">
+        <a:schemeClr val="bg1"/>
+      </p:bgRef>
+    </p:bg>
     <p:spTree>
       <p:nvGrpSpPr>
         <p:cNvPr id="1" name=""/>
@@ -948,6 +641,7 @@
         <a:solidFill>
           <a:srgbClr val="FFFFFF"/>
         </a:solidFill>
+        <a:effectLst/>
       </p:bgPr>
     </p:bg>
     <p:spTree>
@@ -966,377 +660,13 @@
       </p:grpSpPr>
       <p:pic>
         <p:nvPicPr>
-          <p:cNvPr id="2" name="Image 0" descr="preencoded.png">    </p:cNvPr>
+          <p:cNvPr id="2" name="Image 0" descr="preencoded.png"/>
           <p:cNvPicPr>
             <a:picLocks noChangeAspect="1"/>
           </p:cNvPicPr>
           <p:nvPr>
             <p:custDataLst>
-              <p:tags r:id="rId3"/>
-            </p:custDataLst>
-          </p:nvPr>
-        </p:nvPicPr>
-        <p:blipFill>
-          <a:blip r:embed="rId2"/>
-          <a:stretch>
-            <a:fillRect/>
-          </a:stretch>
-        </p:blipFill>
-        <p:spPr>
-          <a:xfrm>
-            <a:off x="602946" y="5415299"/>
-            <a:ext cx="8388096" cy="7229856"/>
-          </a:xfrm>
-          <a:prstGeom prst="rect">
-            <a:avLst/>
-          </a:prstGeom>
-        </p:spPr>
-      </p:pic>
-      <p:pic>
-        <p:nvPicPr>
-          <p:cNvPr id="3" name="Image 1" descr="preencoded.png">    </p:cNvPr>
-          <p:cNvPicPr>
-            <a:picLocks noChangeAspect="1"/>
-          </p:cNvPicPr>
-          <p:nvPr>
-            <p:custDataLst>
-              <p:tags r:id="rId5"/>
-            </p:custDataLst>
-          </p:nvPr>
-        </p:nvPicPr>
-        <p:blipFill>
-          <a:blip r:embed="rId4"/>
-          <a:stretch>
-            <a:fillRect/>
-          </a:stretch>
-        </p:blipFill>
-        <p:spPr>
-          <a:xfrm>
-            <a:off x="676656" y="448058"/>
-            <a:ext cx="8247888" cy="2532888"/>
-          </a:xfrm>
-          <a:prstGeom prst="rect">
-            <a:avLst/>
-          </a:prstGeom>
-        </p:spPr>
-      </p:pic>
-      <p:pic>
-        <p:nvPicPr>
-          <p:cNvPr id="4" name="Image 2" descr="preencoded.png">    </p:cNvPr>
-          <p:cNvPicPr>
-            <a:picLocks noChangeAspect="1"/>
-          </p:cNvPicPr>
-          <p:nvPr>
-            <p:custDataLst>
-              <p:tags r:id="rId7"/>
-            </p:custDataLst>
-          </p:nvPr>
-        </p:nvPicPr>
-        <p:blipFill>
-          <a:blip r:embed="rId6"/>
-          <a:stretch>
-            <a:fillRect/>
-          </a:stretch>
-        </p:blipFill>
-        <p:spPr>
-          <a:xfrm>
-            <a:off x="839023" y="1067620"/>
-            <a:ext cx="3800856" cy="1743456"/>
-          </a:xfrm>
-          <a:prstGeom prst="rect">
-            <a:avLst/>
-          </a:prstGeom>
-        </p:spPr>
-      </p:pic>
-      <p:pic>
-        <p:nvPicPr>
-          <p:cNvPr id="5" name="Image 3" descr="preencoded.png">    </p:cNvPr>
-          <p:cNvPicPr>
-            <a:picLocks noChangeAspect="1"/>
-          </p:cNvPicPr>
-          <p:nvPr>
-            <p:custDataLst>
-              <p:tags r:id="rId9"/>
-            </p:custDataLst>
-          </p:nvPr>
-        </p:nvPicPr>
-        <p:blipFill>
-          <a:blip r:embed="rId8"/>
-          <a:stretch>
-            <a:fillRect/>
-          </a:stretch>
-        </p:blipFill>
-        <p:spPr>
-          <a:xfrm>
-            <a:off x="4724402" y="1066798"/>
-            <a:ext cx="4038600" cy="1752600"/>
-          </a:xfrm>
-          <a:prstGeom prst="rect">
-            <a:avLst/>
-          </a:prstGeom>
-        </p:spPr>
-      </p:pic>
-      <p:pic>
-        <p:nvPicPr>
-          <p:cNvPr id="6" name="Image 4" descr="preencoded.png">    </p:cNvPr>
-          <p:cNvPicPr>
-            <a:picLocks noChangeAspect="1"/>
-          </p:cNvPicPr>
-          <p:nvPr>
-            <p:custDataLst>
-              <p:tags r:id="rId11"/>
-            </p:custDataLst>
-          </p:nvPr>
-        </p:nvPicPr>
-        <p:blipFill>
-          <a:blip r:embed="rId10"/>
-          <a:stretch>
-            <a:fillRect/>
-          </a:stretch>
-        </p:blipFill>
-        <p:spPr>
-          <a:xfrm>
-            <a:off x="1735140" y="1238332"/>
-            <a:ext cx="685800" cy="621792"/>
-          </a:xfrm>
-          <a:prstGeom prst="rect">
-            <a:avLst/>
-          </a:prstGeom>
-        </p:spPr>
-      </p:pic>
-      <p:pic>
-        <p:nvPicPr>
-          <p:cNvPr id="7" name="Image 5" descr="preencoded.png">    </p:cNvPr>
-          <p:cNvPicPr>
-            <a:picLocks noChangeAspect="1"/>
-          </p:cNvPicPr>
-          <p:nvPr>
-            <p:custDataLst>
-              <p:tags r:id="rId13"/>
-            </p:custDataLst>
-          </p:nvPr>
-        </p:nvPicPr>
-        <p:blipFill>
-          <a:blip r:embed="rId12"/>
-          <a:stretch>
-            <a:fillRect/>
-          </a:stretch>
-        </p:blipFill>
-        <p:spPr>
-          <a:xfrm>
-            <a:off x="5198268" y="1270169"/>
-            <a:ext cx="457200" cy="457200"/>
-          </a:xfrm>
-          <a:prstGeom prst="rect">
-            <a:avLst/>
-          </a:prstGeom>
-        </p:spPr>
-      </p:pic>
-      <p:pic>
-        <p:nvPicPr>
-          <p:cNvPr id="8" name="Image 6" descr="preencoded.png">    </p:cNvPr>
-          <p:cNvPicPr>
-            <a:picLocks noChangeAspect="1"/>
-          </p:cNvPicPr>
-          <p:nvPr>
-            <p:custDataLst>
-              <p:tags r:id="rId15"/>
-            </p:custDataLst>
-          </p:nvPr>
-        </p:nvPicPr>
-        <p:blipFill>
-          <a:blip r:embed="rId14"/>
-          <a:stretch>
-            <a:fillRect/>
-          </a:stretch>
-        </p:blipFill>
-        <p:spPr>
-          <a:xfrm>
-            <a:off x="1362462" y="3182977"/>
-            <a:ext cx="6876288" cy="1627632"/>
-          </a:xfrm>
-          <a:prstGeom prst="rect">
-            <a:avLst/>
-          </a:prstGeom>
-        </p:spPr>
-      </p:pic>
-      <p:pic>
-        <p:nvPicPr>
-          <p:cNvPr id="9" name="Image 7" descr="preencoded.png">    </p:cNvPr>
-          <p:cNvPicPr>
-            <a:picLocks noChangeAspect="1"/>
-          </p:cNvPicPr>
-          <p:nvPr>
-            <p:custDataLst>
-              <p:tags r:id="rId17"/>
-            </p:custDataLst>
-          </p:nvPr>
-        </p:nvPicPr>
-        <p:blipFill>
-          <a:blip r:embed="rId16"/>
-          <a:stretch>
-            <a:fillRect/>
-          </a:stretch>
-        </p:blipFill>
-        <p:spPr>
-          <a:xfrm>
-            <a:off x="1472392" y="3172429"/>
-            <a:ext cx="1496568" cy="1539240"/>
-          </a:xfrm>
-          <a:prstGeom prst="rect">
-            <a:avLst/>
-          </a:prstGeom>
-        </p:spPr>
-      </p:pic>
-      <p:pic>
-        <p:nvPicPr>
-          <p:cNvPr id="10" name="Image 8" descr="preencoded.png">    </p:cNvPr>
-          <p:cNvPicPr>
-            <a:picLocks noChangeAspect="1"/>
-          </p:cNvPicPr>
-          <p:nvPr>
-            <p:custDataLst>
-              <p:tags r:id="rId19"/>
-            </p:custDataLst>
-          </p:nvPr>
-        </p:nvPicPr>
-        <p:blipFill>
-          <a:blip r:embed="rId18"/>
-          <a:stretch>
-            <a:fillRect/>
-          </a:stretch>
-        </p:blipFill>
-        <p:spPr>
-          <a:xfrm>
-            <a:off x="5569513" y="7806048"/>
-            <a:ext cx="423672" cy="423672"/>
-          </a:xfrm>
-          <a:prstGeom prst="rect">
-            <a:avLst/>
-          </a:prstGeom>
-        </p:spPr>
-      </p:pic>
-      <p:pic>
-        <p:nvPicPr>
-          <p:cNvPr id="11" name="Image 9" descr="preencoded.png">    </p:cNvPr>
-          <p:cNvPicPr>
-            <a:picLocks noChangeAspect="1"/>
-          </p:cNvPicPr>
-          <p:nvPr>
-            <p:custDataLst>
-              <p:tags r:id="rId21"/>
-            </p:custDataLst>
-          </p:nvPr>
-        </p:nvPicPr>
-        <p:blipFill>
-          <a:blip r:embed="rId20"/>
-          <a:stretch>
-            <a:fillRect/>
-          </a:stretch>
-        </p:blipFill>
-        <p:spPr>
-          <a:xfrm>
-            <a:off x="680857" y="11654029"/>
-            <a:ext cx="8241792" cy="923544"/>
-          </a:xfrm>
-          <a:prstGeom prst="rect">
-            <a:avLst/>
-          </a:prstGeom>
-        </p:spPr>
-      </p:pic>
-      <p:pic>
-        <p:nvPicPr>
-          <p:cNvPr id="12" name="Image 10" descr="preencoded.png">    </p:cNvPr>
-          <p:cNvPicPr>
-            <a:picLocks noChangeAspect="1"/>
-          </p:cNvPicPr>
-          <p:nvPr>
-            <p:custDataLst>
-              <p:tags r:id="rId23"/>
-            </p:custDataLst>
-          </p:nvPr>
-        </p:nvPicPr>
-        <p:blipFill>
-          <a:blip r:embed="rId22"/>
-          <a:stretch>
-            <a:fillRect/>
-          </a:stretch>
-        </p:blipFill>
-        <p:spPr>
-          <a:xfrm>
-            <a:off x="1981042" y="4724472"/>
-            <a:ext cx="2913888" cy="832104"/>
-          </a:xfrm>
-          <a:prstGeom prst="rect">
-            <a:avLst/>
-          </a:prstGeom>
-        </p:spPr>
-      </p:pic>
-      <p:pic>
-        <p:nvPicPr>
-          <p:cNvPr id="13" name="Image 11" descr="preencoded.png">    </p:cNvPr>
-          <p:cNvPicPr>
-            <a:picLocks noChangeAspect="1"/>
-          </p:cNvPicPr>
-          <p:nvPr>
-            <p:custDataLst>
-              <p:tags r:id="rId25"/>
-            </p:custDataLst>
-          </p:nvPr>
-        </p:nvPicPr>
-        <p:blipFill>
-          <a:blip r:embed="rId24"/>
-          <a:stretch>
-            <a:fillRect/>
-          </a:stretch>
-        </p:blipFill>
-        <p:spPr>
-          <a:xfrm>
-            <a:off x="4724044" y="4729951"/>
-            <a:ext cx="176784" cy="829056"/>
-          </a:xfrm>
-          <a:prstGeom prst="rect">
-            <a:avLst/>
-          </a:prstGeom>
-        </p:spPr>
-      </p:pic>
-      <p:pic>
-        <p:nvPicPr>
-          <p:cNvPr id="14" name="Image 12" descr="preencoded.png">    </p:cNvPr>
-          <p:cNvPicPr>
-            <a:picLocks noChangeAspect="1"/>
-          </p:cNvPicPr>
-          <p:nvPr>
-            <p:custDataLst>
-              <p:tags r:id="rId27"/>
-            </p:custDataLst>
-          </p:nvPr>
-        </p:nvPicPr>
-        <p:blipFill>
-          <a:blip r:embed="rId26"/>
-          <a:stretch>
-            <a:fillRect/>
-          </a:stretch>
-        </p:blipFill>
-        <p:spPr>
-          <a:xfrm>
-            <a:off x="4724399" y="4725061"/>
-            <a:ext cx="2895600" cy="838200"/>
-          </a:xfrm>
-          <a:prstGeom prst="rect">
-            <a:avLst/>
-          </a:prstGeom>
-        </p:spPr>
-      </p:pic>
-      <p:pic>
-        <p:nvPicPr>
-          <p:cNvPr id="15" name="Image 13" descr="preencoded.png">    </p:cNvPr>
-          <p:cNvPicPr>
-            <a:picLocks noChangeAspect="1"/>
-          </p:cNvPicPr>
-          <p:nvPr>
-            <p:custDataLst>
-              <p:tags r:id="rId29"/>
+              <p:tags r:id="rId2"/>
             </p:custDataLst>
           </p:nvPr>
         </p:nvPicPr>
@@ -1348,8 +678,8 @@
         </p:blipFill>
         <p:spPr>
           <a:xfrm>
-            <a:off x="609601" y="5409898"/>
-            <a:ext cx="8382000" cy="566928"/>
+            <a:off x="602946" y="5415299"/>
+            <a:ext cx="8388096" cy="7229856"/>
           </a:xfrm>
           <a:prstGeom prst="rect">
             <a:avLst/>
@@ -1358,13 +688,41 @@
       </p:pic>
       <p:pic>
         <p:nvPicPr>
-          <p:cNvPr id="16" name="Image 14" descr="preencoded.png">    </p:cNvPr>
+          <p:cNvPr id="3" name="Image 1" descr="preencoded.png"/>
           <p:cNvPicPr>
             <a:picLocks noChangeAspect="1"/>
           </p:cNvPicPr>
           <p:nvPr>
             <p:custDataLst>
-              <p:tags r:id="rId31"/>
+              <p:tags r:id="rId3"/>
+            </p:custDataLst>
+          </p:nvPr>
+        </p:nvPicPr>
+        <p:blipFill>
+          <a:blip r:embed="rId29"/>
+          <a:stretch>
+            <a:fillRect/>
+          </a:stretch>
+        </p:blipFill>
+        <p:spPr>
+          <a:xfrm>
+            <a:off x="676656" y="448058"/>
+            <a:ext cx="8247888" cy="2532888"/>
+          </a:xfrm>
+          <a:prstGeom prst="rect">
+            <a:avLst/>
+          </a:prstGeom>
+        </p:spPr>
+      </p:pic>
+      <p:pic>
+        <p:nvPicPr>
+          <p:cNvPr id="4" name="Image 2" descr="preencoded.png"/>
+          <p:cNvPicPr>
+            <a:picLocks noChangeAspect="1"/>
+          </p:cNvPicPr>
+          <p:nvPr>
+            <p:custDataLst>
+              <p:tags r:id="rId4"/>
             </p:custDataLst>
           </p:nvPr>
         </p:nvPicPr>
@@ -1376,8 +734,8 @@
         </p:blipFill>
         <p:spPr>
           <a:xfrm>
-            <a:off x="1030316" y="1238991"/>
-            <a:ext cx="704088" cy="704088"/>
+            <a:off x="839023" y="1067620"/>
+            <a:ext cx="3800856" cy="1743456"/>
           </a:xfrm>
           <a:prstGeom prst="rect">
             <a:avLst/>
@@ -1386,13 +744,41 @@
       </p:pic>
       <p:pic>
         <p:nvPicPr>
-          <p:cNvPr id="17" name="Image 15" descr="preencoded.png">    </p:cNvPr>
+          <p:cNvPr id="5" name="Image 3" descr="preencoded.png"/>
           <p:cNvPicPr>
             <a:picLocks noChangeAspect="1"/>
           </p:cNvPicPr>
           <p:nvPr>
             <p:custDataLst>
-              <p:tags r:id="rId33"/>
+              <p:tags r:id="rId5"/>
+            </p:custDataLst>
+          </p:nvPr>
+        </p:nvPicPr>
+        <p:blipFill>
+          <a:blip r:embed="rId31"/>
+          <a:stretch>
+            <a:fillRect/>
+          </a:stretch>
+        </p:blipFill>
+        <p:spPr>
+          <a:xfrm>
+            <a:off x="4724402" y="1066798"/>
+            <a:ext cx="4038600" cy="1752600"/>
+          </a:xfrm>
+          <a:prstGeom prst="rect">
+            <a:avLst/>
+          </a:prstGeom>
+        </p:spPr>
+      </p:pic>
+      <p:pic>
+        <p:nvPicPr>
+          <p:cNvPr id="6" name="Image 4" descr="preencoded.png"/>
+          <p:cNvPicPr>
+            <a:picLocks noChangeAspect="1"/>
+          </p:cNvPicPr>
+          <p:nvPr>
+            <p:custDataLst>
+              <p:tags r:id="rId6"/>
             </p:custDataLst>
           </p:nvPr>
         </p:nvPicPr>
@@ -1404,8 +790,8 @@
         </p:blipFill>
         <p:spPr>
           <a:xfrm>
-            <a:off x="920631" y="1841858"/>
-            <a:ext cx="1819656" cy="859536"/>
+            <a:off x="1735140" y="1238332"/>
+            <a:ext cx="685800" cy="621792"/>
           </a:xfrm>
           <a:prstGeom prst="rect">
             <a:avLst/>
@@ -1414,13 +800,41 @@
       </p:pic>
       <p:pic>
         <p:nvPicPr>
-          <p:cNvPr id="18" name="Image 16" descr="preencoded.png">    </p:cNvPr>
+          <p:cNvPr id="7" name="Image 5" descr="preencoded.png"/>
           <p:cNvPicPr>
             <a:picLocks noChangeAspect="1"/>
           </p:cNvPicPr>
           <p:nvPr>
             <p:custDataLst>
-              <p:tags r:id="rId35"/>
+              <p:tags r:id="rId7"/>
+            </p:custDataLst>
+          </p:nvPr>
+        </p:nvPicPr>
+        <p:blipFill>
+          <a:blip r:embed="rId33"/>
+          <a:stretch>
+            <a:fillRect/>
+          </a:stretch>
+        </p:blipFill>
+        <p:spPr>
+          <a:xfrm>
+            <a:off x="5198268" y="1270169"/>
+            <a:ext cx="457200" cy="457200"/>
+          </a:xfrm>
+          <a:prstGeom prst="rect">
+            <a:avLst/>
+          </a:prstGeom>
+        </p:spPr>
+      </p:pic>
+      <p:pic>
+        <p:nvPicPr>
+          <p:cNvPr id="8" name="Image 6" descr="preencoded.png"/>
+          <p:cNvPicPr>
+            <a:picLocks noChangeAspect="1"/>
+          </p:cNvPicPr>
+          <p:nvPr>
+            <p:custDataLst>
+              <p:tags r:id="rId8"/>
             </p:custDataLst>
           </p:nvPr>
         </p:nvPicPr>
@@ -1432,8 +846,8 @@
         </p:blipFill>
         <p:spPr>
           <a:xfrm>
-            <a:off x="2834345" y="1842238"/>
-            <a:ext cx="1703832" cy="838200"/>
+            <a:off x="1362462" y="3182977"/>
+            <a:ext cx="6876288" cy="1627632"/>
           </a:xfrm>
           <a:prstGeom prst="rect">
             <a:avLst/>
@@ -1442,13 +856,41 @@
       </p:pic>
       <p:pic>
         <p:nvPicPr>
-          <p:cNvPr id="19" name="Image 17" descr="preencoded.png">    </p:cNvPr>
+          <p:cNvPr id="9" name="Image 7" descr="preencoded.png"/>
           <p:cNvPicPr>
             <a:picLocks noChangeAspect="1"/>
           </p:cNvPicPr>
           <p:nvPr>
             <p:custDataLst>
-              <p:tags r:id="rId37"/>
+              <p:tags r:id="rId9"/>
+            </p:custDataLst>
+          </p:nvPr>
+        </p:nvPicPr>
+        <p:blipFill>
+          <a:blip r:embed="rId35"/>
+          <a:stretch>
+            <a:fillRect/>
+          </a:stretch>
+        </p:blipFill>
+        <p:spPr>
+          <a:xfrm>
+            <a:off x="1472392" y="3172429"/>
+            <a:ext cx="1496568" cy="1539240"/>
+          </a:xfrm>
+          <a:prstGeom prst="rect">
+            <a:avLst/>
+          </a:prstGeom>
+        </p:spPr>
+      </p:pic>
+      <p:pic>
+        <p:nvPicPr>
+          <p:cNvPr id="10" name="Image 8" descr="preencoded.png"/>
+          <p:cNvPicPr>
+            <a:picLocks noChangeAspect="1"/>
+          </p:cNvPicPr>
+          <p:nvPr>
+            <p:custDataLst>
+              <p:tags r:id="rId10"/>
             </p:custDataLst>
           </p:nvPr>
         </p:nvPicPr>
@@ -1460,8 +902,8 @@
         </p:blipFill>
         <p:spPr>
           <a:xfrm>
-            <a:off x="4953572" y="1752118"/>
-            <a:ext cx="3590544" cy="978408"/>
+            <a:off x="5569513" y="7806048"/>
+            <a:ext cx="423672" cy="423672"/>
           </a:xfrm>
           <a:prstGeom prst="rect">
             <a:avLst/>
@@ -1470,13 +912,41 @@
       </p:pic>
       <p:pic>
         <p:nvPicPr>
-          <p:cNvPr id="20" name="Image 18" descr="preencoded.png">    </p:cNvPr>
+          <p:cNvPr id="11" name="Image 9" descr="preencoded.png"/>
           <p:cNvPicPr>
             <a:picLocks noChangeAspect="1"/>
           </p:cNvPicPr>
           <p:nvPr>
             <p:custDataLst>
-              <p:tags r:id="rId39"/>
+              <p:tags r:id="rId11"/>
+            </p:custDataLst>
+          </p:nvPr>
+        </p:nvPicPr>
+        <p:blipFill>
+          <a:blip r:embed="rId37"/>
+          <a:stretch>
+            <a:fillRect/>
+          </a:stretch>
+        </p:blipFill>
+        <p:spPr>
+          <a:xfrm>
+            <a:off x="680857" y="11654029"/>
+            <a:ext cx="8241792" cy="923544"/>
+          </a:xfrm>
+          <a:prstGeom prst="rect">
+            <a:avLst/>
+          </a:prstGeom>
+        </p:spPr>
+      </p:pic>
+      <p:pic>
+        <p:nvPicPr>
+          <p:cNvPr id="12" name="Image 10" descr="preencoded.png"/>
+          <p:cNvPicPr>
+            <a:picLocks noChangeAspect="1"/>
+          </p:cNvPicPr>
+          <p:nvPr>
+            <p:custDataLst>
+              <p:tags r:id="rId12"/>
             </p:custDataLst>
           </p:nvPr>
         </p:nvPicPr>
@@ -1488,6 +958,230 @@
         </p:blipFill>
         <p:spPr>
           <a:xfrm>
+            <a:off x="1981042" y="4724472"/>
+            <a:ext cx="2913888" cy="832104"/>
+          </a:xfrm>
+          <a:prstGeom prst="rect">
+            <a:avLst/>
+          </a:prstGeom>
+        </p:spPr>
+      </p:pic>
+      <p:pic>
+        <p:nvPicPr>
+          <p:cNvPr id="13" name="Image 11" descr="preencoded.png"/>
+          <p:cNvPicPr>
+            <a:picLocks noChangeAspect="1"/>
+          </p:cNvPicPr>
+          <p:nvPr>
+            <p:custDataLst>
+              <p:tags r:id="rId13"/>
+            </p:custDataLst>
+          </p:nvPr>
+        </p:nvPicPr>
+        <p:blipFill>
+          <a:blip r:embed="rId39"/>
+          <a:stretch>
+            <a:fillRect/>
+          </a:stretch>
+        </p:blipFill>
+        <p:spPr>
+          <a:xfrm>
+            <a:off x="4724044" y="4729951"/>
+            <a:ext cx="176784" cy="829056"/>
+          </a:xfrm>
+          <a:prstGeom prst="rect">
+            <a:avLst/>
+          </a:prstGeom>
+        </p:spPr>
+      </p:pic>
+      <p:pic>
+        <p:nvPicPr>
+          <p:cNvPr id="14" name="Image 12" descr="preencoded.png"/>
+          <p:cNvPicPr>
+            <a:picLocks noChangeAspect="1"/>
+          </p:cNvPicPr>
+          <p:nvPr>
+            <p:custDataLst>
+              <p:tags r:id="rId14"/>
+            </p:custDataLst>
+          </p:nvPr>
+        </p:nvPicPr>
+        <p:blipFill>
+          <a:blip r:embed="rId40"/>
+          <a:stretch>
+            <a:fillRect/>
+          </a:stretch>
+        </p:blipFill>
+        <p:spPr>
+          <a:xfrm>
+            <a:off x="4724399" y="4725061"/>
+            <a:ext cx="2895600" cy="838200"/>
+          </a:xfrm>
+          <a:prstGeom prst="rect">
+            <a:avLst/>
+          </a:prstGeom>
+        </p:spPr>
+      </p:pic>
+      <p:pic>
+        <p:nvPicPr>
+          <p:cNvPr id="15" name="Image 13" descr="preencoded.png"/>
+          <p:cNvPicPr>
+            <a:picLocks noChangeAspect="1"/>
+          </p:cNvPicPr>
+          <p:nvPr>
+            <p:custDataLst>
+              <p:tags r:id="rId15"/>
+            </p:custDataLst>
+          </p:nvPr>
+        </p:nvPicPr>
+        <p:blipFill>
+          <a:blip r:embed="rId41"/>
+          <a:stretch>
+            <a:fillRect/>
+          </a:stretch>
+        </p:blipFill>
+        <p:spPr>
+          <a:xfrm>
+            <a:off x="609601" y="5409898"/>
+            <a:ext cx="8382000" cy="566928"/>
+          </a:xfrm>
+          <a:prstGeom prst="rect">
+            <a:avLst/>
+          </a:prstGeom>
+        </p:spPr>
+      </p:pic>
+      <p:pic>
+        <p:nvPicPr>
+          <p:cNvPr id="16" name="Image 14" descr="preencoded.png"/>
+          <p:cNvPicPr>
+            <a:picLocks noChangeAspect="1"/>
+          </p:cNvPicPr>
+          <p:nvPr>
+            <p:custDataLst>
+              <p:tags r:id="rId16"/>
+            </p:custDataLst>
+          </p:nvPr>
+        </p:nvPicPr>
+        <p:blipFill>
+          <a:blip r:embed="rId42"/>
+          <a:stretch>
+            <a:fillRect/>
+          </a:stretch>
+        </p:blipFill>
+        <p:spPr>
+          <a:xfrm>
+            <a:off x="1030316" y="1238991"/>
+            <a:ext cx="704088" cy="704088"/>
+          </a:xfrm>
+          <a:prstGeom prst="rect">
+            <a:avLst/>
+          </a:prstGeom>
+        </p:spPr>
+      </p:pic>
+      <p:pic>
+        <p:nvPicPr>
+          <p:cNvPr id="17" name="Image 15" descr="preencoded.png"/>
+          <p:cNvPicPr>
+            <a:picLocks noChangeAspect="1"/>
+          </p:cNvPicPr>
+          <p:nvPr>
+            <p:custDataLst>
+              <p:tags r:id="rId17"/>
+            </p:custDataLst>
+          </p:nvPr>
+        </p:nvPicPr>
+        <p:blipFill>
+          <a:blip r:embed="rId43"/>
+          <a:stretch>
+            <a:fillRect/>
+          </a:stretch>
+        </p:blipFill>
+        <p:spPr>
+          <a:xfrm>
+            <a:off x="920631" y="1841858"/>
+            <a:ext cx="1819656" cy="859536"/>
+          </a:xfrm>
+          <a:prstGeom prst="rect">
+            <a:avLst/>
+          </a:prstGeom>
+        </p:spPr>
+      </p:pic>
+      <p:pic>
+        <p:nvPicPr>
+          <p:cNvPr id="18" name="Image 16" descr="preencoded.png"/>
+          <p:cNvPicPr>
+            <a:picLocks noChangeAspect="1"/>
+          </p:cNvPicPr>
+          <p:nvPr>
+            <p:custDataLst>
+              <p:tags r:id="rId18"/>
+            </p:custDataLst>
+          </p:nvPr>
+        </p:nvPicPr>
+        <p:blipFill>
+          <a:blip r:embed="rId44"/>
+          <a:stretch>
+            <a:fillRect/>
+          </a:stretch>
+        </p:blipFill>
+        <p:spPr>
+          <a:xfrm>
+            <a:off x="2834345" y="1842238"/>
+            <a:ext cx="1703832" cy="838200"/>
+          </a:xfrm>
+          <a:prstGeom prst="rect">
+            <a:avLst/>
+          </a:prstGeom>
+        </p:spPr>
+      </p:pic>
+      <p:pic>
+        <p:nvPicPr>
+          <p:cNvPr id="19" name="Image 17" descr="preencoded.png"/>
+          <p:cNvPicPr>
+            <a:picLocks noChangeAspect="1"/>
+          </p:cNvPicPr>
+          <p:nvPr>
+            <p:custDataLst>
+              <p:tags r:id="rId19"/>
+            </p:custDataLst>
+          </p:nvPr>
+        </p:nvPicPr>
+        <p:blipFill>
+          <a:blip r:embed="rId45"/>
+          <a:stretch>
+            <a:fillRect/>
+          </a:stretch>
+        </p:blipFill>
+        <p:spPr>
+          <a:xfrm>
+            <a:off x="4953572" y="1752118"/>
+            <a:ext cx="3590544" cy="978408"/>
+          </a:xfrm>
+          <a:prstGeom prst="rect">
+            <a:avLst/>
+          </a:prstGeom>
+        </p:spPr>
+      </p:pic>
+      <p:pic>
+        <p:nvPicPr>
+          <p:cNvPr id="20" name="Image 18" descr="preencoded.png"/>
+          <p:cNvPicPr>
+            <a:picLocks noChangeAspect="1"/>
+          </p:cNvPicPr>
+          <p:nvPr>
+            <p:custDataLst>
+              <p:tags r:id="rId20"/>
+            </p:custDataLst>
+          </p:nvPr>
+        </p:nvPicPr>
+        <p:blipFill>
+          <a:blip r:embed="rId46"/>
+          <a:stretch>
+            <a:fillRect/>
+          </a:stretch>
+        </p:blipFill>
+        <p:spPr>
+          <a:xfrm>
             <a:off x="5106641" y="2055700"/>
             <a:ext cx="3334512" cy="609600"/>
           </a:xfrm>
@@ -1517,7 +1211,7 @@
           <a:bodyPr wrap="square" lIns="0" tIns="0" rIns="0" bIns="0" rtlCol="0" anchor="t"/>
           <a:lstStyle/>
           <a:p>
-            <a:pPr algn="l" indent="0" marL="0">
+            <a:pPr marL="0" indent="0" algn="l">
               <a:lnSpc>
                 <a:spcPct val="96985"/>
               </a:lnSpc>
@@ -1559,7 +1253,7 @@
           <a:bodyPr wrap="square" lIns="0" tIns="0" rIns="0" bIns="0" rtlCol="0" anchor="t"/>
           <a:lstStyle/>
           <a:p>
-            <a:pPr algn="l" indent="0" marL="0">
+            <a:pPr marL="0" indent="0" algn="l">
               <a:lnSpc>
                 <a:spcPct val="96985"/>
               </a:lnSpc>
@@ -1601,7 +1295,7 @@
           <a:bodyPr wrap="square" lIns="0" tIns="0" rIns="0" bIns="0" rtlCol="0" anchor="t"/>
           <a:lstStyle/>
           <a:p>
-            <a:pPr algn="l" indent="0" marL="0">
+            <a:pPr marL="0" indent="0" algn="l">
               <a:lnSpc>
                 <a:spcPct val="102373"/>
               </a:lnSpc>
@@ -1624,18 +1318,18 @@
       </p:sp>
       <p:pic>
         <p:nvPicPr>
-          <p:cNvPr id="24" name="Image 19" descr="preencoded.png">    </p:cNvPr>
+          <p:cNvPr id="24" name="Image 19" descr="preencoded.png"/>
           <p:cNvPicPr>
             <a:picLocks noChangeAspect="1"/>
           </p:cNvPicPr>
           <p:nvPr>
             <p:custDataLst>
-              <p:tags r:id="rId41"/>
+              <p:tags r:id="rId21"/>
             </p:custDataLst>
           </p:nvPr>
         </p:nvPicPr>
         <p:blipFill>
-          <a:blip r:embed="rId40"/>
+          <a:blip r:embed="rId47"/>
           <a:stretch>
             <a:fillRect/>
           </a:stretch>
@@ -1652,18 +1346,18 @@
       </p:pic>
       <p:pic>
         <p:nvPicPr>
-          <p:cNvPr id="25" name="Image 20" descr="preencoded.png">    </p:cNvPr>
+          <p:cNvPr id="25" name="Image 20" descr="preencoded.png"/>
           <p:cNvPicPr>
             <a:picLocks noChangeAspect="1"/>
           </p:cNvPicPr>
           <p:nvPr>
             <p:custDataLst>
-              <p:tags r:id="rId43"/>
+              <p:tags r:id="rId22"/>
             </p:custDataLst>
           </p:nvPr>
         </p:nvPicPr>
         <p:blipFill>
-          <a:blip r:embed="rId42"/>
+          <a:blip r:embed="rId48"/>
           <a:stretch>
             <a:fillRect/>
           </a:stretch>
@@ -1680,18 +1374,18 @@
       </p:pic>
       <p:pic>
         <p:nvPicPr>
-          <p:cNvPr id="26" name="Image 21" descr="preencoded.png">    </p:cNvPr>
+          <p:cNvPr id="26" name="Image 21" descr="preencoded.png"/>
           <p:cNvPicPr>
             <a:picLocks noChangeAspect="1"/>
           </p:cNvPicPr>
           <p:nvPr>
             <p:custDataLst>
-              <p:tags r:id="rId45"/>
+              <p:tags r:id="rId23"/>
             </p:custDataLst>
           </p:nvPr>
         </p:nvPicPr>
         <p:blipFill>
-          <a:blip r:embed="rId44"/>
+          <a:blip r:embed="rId49"/>
           <a:stretch>
             <a:fillRect/>
           </a:stretch>
@@ -1708,18 +1402,18 @@
       </p:pic>
       <p:pic>
         <p:nvPicPr>
-          <p:cNvPr id="27" name="Image 22" descr="preencoded.png">    </p:cNvPr>
+          <p:cNvPr id="27" name="Image 22" descr="preencoded.png"/>
           <p:cNvPicPr>
             <a:picLocks noChangeAspect="1"/>
           </p:cNvPicPr>
           <p:nvPr>
             <p:custDataLst>
-              <p:tags r:id="rId47"/>
+              <p:tags r:id="rId24"/>
             </p:custDataLst>
           </p:nvPr>
         </p:nvPicPr>
         <p:blipFill>
-          <a:blip r:embed="rId46"/>
+          <a:blip r:embed="rId50"/>
           <a:stretch>
             <a:fillRect/>
           </a:stretch>
@@ -1736,18 +1430,18 @@
       </p:pic>
       <p:pic>
         <p:nvPicPr>
-          <p:cNvPr id="28" name="Image 23" descr="preencoded.png">    </p:cNvPr>
+          <p:cNvPr id="28" name="Image 23" descr="preencoded.png"/>
           <p:cNvPicPr>
             <a:picLocks noChangeAspect="1"/>
           </p:cNvPicPr>
           <p:nvPr>
             <p:custDataLst>
-              <p:tags r:id="rId49"/>
+              <p:tags r:id="rId25"/>
             </p:custDataLst>
           </p:nvPr>
         </p:nvPicPr>
         <p:blipFill>
-          <a:blip r:embed="rId48"/>
+          <a:blip r:embed="rId51"/>
           <a:stretch>
             <a:fillRect/>
           </a:stretch>
@@ -1773,710 +1467,7 @@
 </p:sld>
 </file>
 
-<file path=ppt/slides/slide2.xml><?xml version="1.0" encoding="utf-8"?>
-<p:sld xmlns:a="http://schemas.openxmlformats.org/drawingml/2006/main" xmlns:r="http://schemas.openxmlformats.org/officeDocument/2006/relationships" xmlns:p="http://schemas.openxmlformats.org/presentationml/2006/main">
-  <p:cSld name="Slide 2">
-    <p:spTree>
-      <p:nvGrpSpPr>
-        <p:cNvPr id="1" name=""/>
-        <p:cNvGrpSpPr/>
-        <p:nvPr/>
-      </p:nvGrpSpPr>
-      <p:grpSpPr>
-        <a:xfrm>
-          <a:off x="0" y="0"/>
-          <a:ext cx="0" cy="0"/>
-          <a:chOff x="0" y="0"/>
-          <a:chExt cx="0" cy="0"/>
-        </a:xfrm>
-      </p:grpSpPr>
-      <p:sp>
-        <p:nvSpPr>
-          <p:cNvPr id="2" name="Shape 0"/>
-          <p:cNvSpPr/>
-          <p:nvPr/>
-        </p:nvSpPr>
-        <p:spPr>
-          <a:xfrm>
-            <a:off x="5298368" y="2578397"/>
-            <a:ext cx="3853359" cy="7706718"/>
-          </a:xfrm>
-          <a:custGeom>
-            <a:avLst/>
-            <a:gdLst/>
-            <a:ahLst/>
-            <a:cxnLst/>
-            <a:rect l="l" t="t" r="r" b="b"/>
-            <a:pathLst>
-              <a:path w="3853359" h="7706718">
-                <a:moveTo>
-                  <a:pt x="0" y="0"/>
-                </a:moveTo>
-                <a:lnTo>
-                  <a:pt x="0" y="7706718"/>
-                </a:lnTo>
-                <a:lnTo>
-                  <a:pt x="3853359" y="7706718"/>
-                </a:lnTo>
-                <a:lnTo>
-                  <a:pt x="3853359" y="385336"/>
-                </a:lnTo>
-                <a:lnTo>
-                  <a:pt x="3468023" y="0"/>
-                </a:lnTo>
-                <a:close/>
-              </a:path>
-            </a:pathLst>
-          </a:custGeom>
-          <a:solidFill>
-            <a:srgbClr val="E9F0F8"/>
-          </a:solidFill>
-          <a:ln/>
-          <a:effectLst>
-            <a:outerShdw sx="100000" sy="100000" kx="0" ky="0" algn="bl" rotWithShape="0" blurRad="10704" dist="21408" dir="2700000">
-              <a:srgbClr val="000000">
-                <a:alpha val="12000"/>
-              </a:srgbClr>
-            </a:outerShdw>
-          </a:effectLst>
-        </p:spPr>
-      </p:sp>
-      <p:sp>
-        <p:nvSpPr>
-          <p:cNvPr id="3" name="Shape 1"/>
-          <p:cNvSpPr/>
-          <p:nvPr/>
-        </p:nvSpPr>
-        <p:spPr>
-          <a:xfrm>
-            <a:off x="8766391" y="2578397"/>
-            <a:ext cx="385336" cy="462403"/>
-          </a:xfrm>
-          <a:custGeom>
-            <a:avLst/>
-            <a:gdLst/>
-            <a:ahLst/>
-            <a:cxnLst/>
-            <a:rect l="l" t="t" r="r" b="b"/>
-            <a:pathLst>
-              <a:path w="385336" h="462403">
-                <a:moveTo>
-                  <a:pt x="0" y="0"/>
-                </a:moveTo>
-                <a:lnTo>
-                  <a:pt x="154134" y="462403"/>
-                </a:lnTo>
-                <a:lnTo>
-                  <a:pt x="385336" y="385336"/>
-                </a:lnTo>
-                <a:close/>
-              </a:path>
-            </a:pathLst>
-          </a:custGeom>
-          <a:solidFill>
-            <a:srgbClr val="92B7DB"/>
-          </a:solidFill>
-          <a:ln/>
-        </p:spPr>
-      </p:sp>
-      <p:sp>
-        <p:nvSpPr>
-          <p:cNvPr id="4" name="Shape 2"/>
-          <p:cNvSpPr/>
-          <p:nvPr/>
-        </p:nvSpPr>
-        <p:spPr>
-          <a:xfrm>
-            <a:off x="8766391" y="2578397"/>
-            <a:ext cx="385336" cy="385336"/>
-          </a:xfrm>
-          <a:custGeom>
-            <a:avLst/>
-            <a:gdLst/>
-            <a:ahLst/>
-            <a:cxnLst/>
-            <a:rect l="l" t="t" r="r" b="b"/>
-            <a:pathLst>
-              <a:path w="385336" h="385336">
-                <a:moveTo>
-                  <a:pt x="0" y="0"/>
-                </a:moveTo>
-                <a:lnTo>
-                  <a:pt x="57800" y="385336"/>
-                </a:lnTo>
-                <a:lnTo>
-                  <a:pt x="385336" y="385336"/>
-                </a:lnTo>
-                <a:close/>
-              </a:path>
-            </a:pathLst>
-          </a:custGeom>
-          <a:solidFill>
-            <a:srgbClr val="CCD8E7"/>
-          </a:solidFill>
-          <a:ln/>
-        </p:spPr>
-      </p:sp>
-      <p:pic>
-        <p:nvPicPr>
-          <p:cNvPr id="5" name="Image 0" descr="https://assets.cdn.biorender.com/assets/biorender-logo-blue.svg?cacheBust=0.22359964535700627">    </p:cNvPr>
-          <p:cNvPicPr>
-            <a:picLocks noChangeAspect="1"/>
-          </p:cNvPicPr>
-          <p:nvPr/>
-        </p:nvPicPr>
-        <p:blipFill>
-          <a:blip r:embed="rId1">
-            <a:extLst>
-              <a:ext uri="{96DAC541-7B7A-43D3-8B79-37D633B846F1}">
-                <asvg:svgBlip xmlns:asvg="http://schemas.microsoft.com/office/drawing/2016/SVG/main" r:embed="rId2"/>
-              </a:ext>
-            </a:extLst>
-          </a:blip>
-          <a:stretch>
-            <a:fillRect/>
-          </a:stretch>
-        </p:blipFill>
-        <p:spPr>
-          <a:xfrm>
-            <a:off x="481670" y="4869527"/>
-            <a:ext cx="924806" cy="781114"/>
-          </a:xfrm>
-          <a:prstGeom prst="rect">
-            <a:avLst/>
-          </a:prstGeom>
-        </p:spPr>
-      </p:pic>
-      <p:sp>
-        <p:nvSpPr>
-          <p:cNvPr id="6" name="Text 3"/>
-          <p:cNvSpPr/>
-          <p:nvPr/>
-        </p:nvSpPr>
-        <p:spPr>
-          <a:xfrm>
-            <a:off x="481670" y="6041199"/>
-            <a:ext cx="4335029" cy="5788581"/>
-          </a:xfrm>
-          <a:prstGeom prst="rect">
-            <a:avLst/>
-          </a:prstGeom>
-          <a:noFill/>
-          <a:ln/>
-        </p:spPr>
-        <p:txBody>
-          <a:bodyPr wrap="square" lIns="0" tIns="0" rIns="0" bIns="0" rtlCol="0" anchor="t"/>
-          <a:lstStyle/>
-          <a:p>
-            <a:pPr algn="l" indent="0" marL="0">
-              <a:buNone/>
-            </a:pPr>
-            <a:r>
-              <a:rPr lang="en-US" sz="1517" b="1" dirty="0">
-                <a:solidFill>
-                  <a:srgbClr val="000000"/>
-                </a:solidFill>
-                <a:latin typeface="Roboto" pitchFamily="34" charset="0"/>
-                <a:ea typeface="Roboto" pitchFamily="34" charset="-122"/>
-                <a:cs typeface="Roboto" pitchFamily="34" charset="-120"/>
-              </a:rPr>
-              <a:t>This presentation was created in BioRender</a:t>
-            </a:r>
-            <a:endParaRPr lang="en-US" sz="1517" dirty="0"/>
-          </a:p>
-          <a:p>
-            <a:pPr algn="l" indent="0" marL="0">
-              <a:buNone/>
-            </a:pPr>
-            <a:r>
-              <a:rPr lang="en-US" sz="1517" dirty="0">
-                <a:solidFill>
-                  <a:srgbClr val="000000"/>
-                </a:solidFill>
-                <a:latin typeface="Roboto" pitchFamily="34" charset="0"/>
-                <a:ea typeface="Roboto" pitchFamily="34" charset="-122"/>
-                <a:cs typeface="Roboto" pitchFamily="34" charset="-120"/>
-              </a:rPr>
-              <a:t> </a:t>
-            </a:r>
-            <a:endParaRPr lang="en-US" sz="1517" dirty="0"/>
-          </a:p>
-          <a:p>
-            <a:pPr algn="l" indent="0" marL="0">
-              <a:buNone/>
-            </a:pPr>
-            <a:r>
-              <a:rPr lang="en-US" sz="1517" dirty="0">
-                <a:solidFill>
-                  <a:srgbClr val="000000"/>
-                </a:solidFill>
-                <a:latin typeface="Roboto" pitchFamily="34" charset="0"/>
-                <a:ea typeface="Roboto" pitchFamily="34" charset="-122"/>
-                <a:cs typeface="Roboto" pitchFamily="34" charset="-120"/>
-              </a:rPr>
-              <a:t>To access the original source of this presentation, visit:</a:t>
-            </a:r>
-            <a:endParaRPr lang="en-US" sz="1517" dirty="0"/>
-          </a:p>
-          <a:p>
-            <a:pPr algn="l" indent="0" marL="0">
-              <a:buNone/>
-            </a:pPr>
-            <a:r>
-              <a:rPr lang="en-US" sz="1517" dirty="0">
-                <a:solidFill>
-                  <a:srgbClr val="000000"/>
-                </a:solidFill>
-                <a:latin typeface="Roboto" pitchFamily="34" charset="0"/>
-                <a:ea typeface="Roboto" pitchFamily="34" charset="-122"/>
-                <a:cs typeface="Roboto" pitchFamily="34" charset="-120"/>
-              </a:rPr>
-              <a:t> </a:t>
-            </a:r>
-            <a:endParaRPr lang="en-US" sz="1517" dirty="0"/>
-          </a:p>
-          <a:p>
-            <a:pPr algn="l" indent="0" marL="0">
-              <a:buNone/>
-            </a:pPr>
-            <a:r>
-              <a:rPr lang="en-US" sz="1517" u="sng" dirty="0">
-                <a:solidFill>
-                  <a:srgbClr val="085299"/>
-                </a:solidFill>
-                <a:latin typeface="Roboto" pitchFamily="34" charset="0"/>
-                <a:ea typeface="Roboto" pitchFamily="34" charset="-122"/>
-                <a:cs typeface="Roboto" pitchFamily="34" charset="-120"/>
-                <a:hlinkClick r:id="rId3" invalidUrl="" action="" tgtFrame="" tooltip="" history="1" highlightClick="0" endSnd="0">
-                  <a:extLst>
-                    <a:ext uri="{A12FA001-AC4F-418D-AE19-62706E023703}">
-                      <ahyp:hlinkClr xmlns:ahyp="http://schemas.microsoft.com/office/drawing/2018/hyperlinkcolor" val="tx"/>
-                    </a:ext>
-                  </a:extLst>
-                </a:hlinkClick>
-              </a:rPr>
-              <a:t>https://app.biorender.com/illustrations/6a165fae96a91fe4bad0ed31</a:t>
-            </a:r>
-            <a:endParaRPr lang="en-US" sz="1517" dirty="0"/>
-          </a:p>
-          <a:p>
-            <a:pPr algn="l" indent="0" marL="0">
-              <a:buNone/>
-            </a:pPr>
-            <a:r>
-              <a:rPr lang="en-US" sz="1517" dirty="0">
-                <a:solidFill>
-                  <a:srgbClr val="000000"/>
-                </a:solidFill>
-                <a:latin typeface="Roboto" pitchFamily="34" charset="0"/>
-                <a:ea typeface="Roboto" pitchFamily="34" charset="-122"/>
-                <a:cs typeface="Roboto" pitchFamily="34" charset="-120"/>
-              </a:rPr>
-              <a:t> </a:t>
-            </a:r>
-            <a:endParaRPr lang="en-US" sz="1517" dirty="0"/>
-          </a:p>
-          <a:p>
-            <a:pPr algn="l" indent="0" marL="0">
-              <a:buNone/>
-            </a:pPr>
-            <a:r>
-              <a:rPr lang="en-US" sz="1517" dirty="0">
-                <a:solidFill>
-                  <a:srgbClr val="000000"/>
-                </a:solidFill>
-                <a:latin typeface="Roboto" pitchFamily="34" charset="0"/>
-                <a:ea typeface="Roboto" pitchFamily="34" charset="-122"/>
-                <a:cs typeface="Roboto" pitchFamily="34" charset="-120"/>
-              </a:rPr>
-              <a:t>Sign up for your own BioRender account at </a:t>
-            </a:r>
-            <a:pPr algn="l" indent="0" marL="0">
-              <a:buNone/>
-            </a:pPr>
-            <a:r>
-              <a:rPr lang="en-US" sz="1517" u="sng" dirty="0">
-                <a:solidFill>
-                  <a:srgbClr val="085299"/>
-                </a:solidFill>
-                <a:latin typeface="Roboto" pitchFamily="34" charset="0"/>
-                <a:ea typeface="Roboto" pitchFamily="34" charset="-122"/>
-                <a:cs typeface="Roboto" pitchFamily="34" charset="-120"/>
-                <a:hlinkClick r:id="rId4" invalidUrl="" action="" tgtFrame="" tooltip="" history="1" highlightClick="0" endSnd="0">
-                  <a:extLst>
-                    <a:ext uri="{A12FA001-AC4F-418D-AE19-62706E023703}">
-                      <ahyp:hlinkClr xmlns:ahyp="http://schemas.microsoft.com/office/drawing/2018/hyperlinkcolor" val="tx"/>
-                    </a:ext>
-                  </a:extLst>
-                </a:hlinkClick>
-              </a:rPr>
-              <a:t>www.biorender.com</a:t>
-            </a:r>
-            <a:endParaRPr lang="en-US" sz="1517" dirty="0"/>
-          </a:p>
-        </p:txBody>
-      </p:sp>
-      <p:pic>
-        <p:nvPicPr>
-          <p:cNvPr id="7" name="Image 1" descr="https://assets.cdn.biorender.com/assets/office/biorender-ppt-lockup.svg?cacheBust=0.6859838324751307">    </p:cNvPr>
-          <p:cNvPicPr>
-            <a:picLocks noChangeAspect="1"/>
-          </p:cNvPicPr>
-          <p:nvPr/>
-        </p:nvPicPr>
-        <p:blipFill>
-          <a:blip r:embed="rId5">
-            <a:extLst>
-              <a:ext uri="{96DAC541-7B7A-43D3-8B79-37D633B846F1}">
-                <asvg:svgBlip xmlns:asvg="http://schemas.microsoft.com/office/drawing/2016/SVG/main" r:embed="rId6"/>
-              </a:ext>
-            </a:extLst>
-          </a:blip>
-          <a:stretch>
-            <a:fillRect/>
-          </a:stretch>
-        </p:blipFill>
-        <p:spPr>
-          <a:xfrm>
-            <a:off x="6187415" y="3117868"/>
-            <a:ext cx="2075265" cy="898912"/>
-          </a:xfrm>
-          <a:prstGeom prst="rect">
-            <a:avLst/>
-          </a:prstGeom>
-        </p:spPr>
-      </p:pic>
-      <p:sp>
-        <p:nvSpPr>
-          <p:cNvPr id="8" name="Text 4"/>
-          <p:cNvSpPr/>
-          <p:nvPr/>
-        </p:nvSpPr>
-        <p:spPr>
-          <a:xfrm>
-            <a:off x="5683704" y="4273875"/>
-            <a:ext cx="3082687" cy="5394702"/>
-          </a:xfrm>
-          <a:prstGeom prst="rect">
-            <a:avLst/>
-          </a:prstGeom>
-          <a:noFill/>
-          <a:ln/>
-        </p:spPr>
-        <p:txBody>
-          <a:bodyPr wrap="square" lIns="0" tIns="0" rIns="0" bIns="0" rtlCol="0" anchor="t"/>
-          <a:lstStyle/>
-          <a:p>
-            <a:pPr algn="ctr" indent="0" marL="0">
-              <a:lnSpc>
-                <a:spcPts val="1686"/>
-              </a:lnSpc>
-              <a:buNone/>
-            </a:pPr>
-            <a:r>
-              <a:rPr lang="en-US" sz="1349" dirty="0">
-                <a:solidFill>
-                  <a:srgbClr val="085299"/>
-                </a:solidFill>
-                <a:latin typeface="Roboto" pitchFamily="34" charset="0"/>
-                <a:ea typeface="Roboto" pitchFamily="34" charset="-122"/>
-                <a:cs typeface="Roboto" pitchFamily="34" charset="-120"/>
-              </a:rPr>
-              <a:t>Get the BioRender Add-in for PowerPoint</a:t>
-            </a:r>
-            <a:endParaRPr lang="en-US" sz="1222" dirty="0"/>
-          </a:p>
-          <a:p>
-            <a:pPr algn="l" indent="0" marL="0">
-              <a:lnSpc>
-                <a:spcPts val="2107"/>
-              </a:lnSpc>
-              <a:buNone/>
-            </a:pPr>
-            <a:endParaRPr lang="en-US" sz="1222" dirty="0"/>
-          </a:p>
-          <a:p>
-            <a:pPr algn="l" indent="0" marL="0">
-              <a:lnSpc>
-                <a:spcPts val="1686"/>
-              </a:lnSpc>
-              <a:buNone/>
-            </a:pPr>
-            <a:r>
-              <a:rPr lang="en-US" sz="1222" dirty="0">
-                <a:solidFill>
-                  <a:srgbClr val="383F47"/>
-                </a:solidFill>
-                <a:latin typeface="Roboto" pitchFamily="34" charset="0"/>
-                <a:ea typeface="Roboto" pitchFamily="34" charset="-122"/>
-                <a:cs typeface="Roboto" pitchFamily="34" charset="-120"/>
-              </a:rPr>
-              <a:t>Our integration allows you to unlock the power of BioRender, right inside PowerPoint:</a:t>
-            </a:r>
-            <a:endParaRPr lang="en-US" sz="1222" dirty="0"/>
-          </a:p>
-          <a:p>
-            <a:pPr algn="l" indent="0" marL="0">
-              <a:lnSpc>
-                <a:spcPts val="1686"/>
-              </a:lnSpc>
-              <a:buNone/>
-            </a:pPr>
-            <a:endParaRPr lang="en-US" sz="1222" dirty="0"/>
-          </a:p>
-          <a:p>
-            <a:pPr algn="l" lvl="1" marL="254000" indent="-127000">
-              <a:lnSpc>
-                <a:spcPts val="1686"/>
-              </a:lnSpc>
-              <a:buSzPct val="100000"/>
-              <a:buChar char="●"/>
-            </a:pPr>
-            <a:r>
-              <a:rPr lang="en-US" sz="1222" dirty="0">
-                <a:solidFill>
-                  <a:srgbClr val="383F47"/>
-                </a:solidFill>
-                <a:latin typeface="Roboto" pitchFamily="34" charset="0"/>
-                <a:ea typeface="Roboto" pitchFamily="34" charset="-122"/>
-                <a:cs typeface="Roboto" pitchFamily="34" charset="-120"/>
-              </a:rPr>
-              <a:t>Export your BioRender presentation as an editable .PPTX file.</a:t>
-            </a:r>
-            <a:endParaRPr lang="en-US" sz="1222" dirty="0"/>
-          </a:p>
-          <a:p>
-            <a:pPr algn="l" lvl="1" marL="254000" indent="-127000">
-              <a:lnSpc>
-                <a:spcPts val="1686"/>
-              </a:lnSpc>
-              <a:buSzPct val="100000"/>
-              <a:buChar char="●"/>
-            </a:pPr>
-            <a:r>
-              <a:rPr lang="en-US" sz="1222" dirty="0">
-                <a:solidFill>
-                  <a:srgbClr val="383F47"/>
-                </a:solidFill>
-                <a:latin typeface="Roboto" pitchFamily="34" charset="0"/>
-                <a:ea typeface="Roboto" pitchFamily="34" charset="-122"/>
-                <a:cs typeface="Roboto" pitchFamily="34" charset="-120"/>
-              </a:rPr>
-              <a:t>Edit BioRender figures without leaving your PowerPoint slides.</a:t>
-            </a:r>
-            <a:endParaRPr lang="en-US" sz="1222" dirty="0"/>
-          </a:p>
-          <a:p>
-            <a:pPr algn="l" lvl="1" marL="254000" indent="-127000">
-              <a:lnSpc>
-                <a:spcPts val="1686"/>
-              </a:lnSpc>
-              <a:buSzPct val="100000"/>
-              <a:buChar char="●"/>
-            </a:pPr>
-            <a:r>
-              <a:rPr lang="en-US" sz="1222" dirty="0">
-                <a:solidFill>
-                  <a:srgbClr val="383F47"/>
-                </a:solidFill>
-                <a:latin typeface="Roboto" pitchFamily="34" charset="0"/>
-                <a:ea typeface="Roboto" pitchFamily="34" charset="-122"/>
-                <a:cs typeface="Roboto" pitchFamily="34" charset="-120"/>
-              </a:rPr>
-              <a:t>Sync updates from BioRender with just one click.</a:t>
-            </a:r>
-            <a:endParaRPr lang="en-US" sz="1222" dirty="0"/>
-          </a:p>
-          <a:p>
-            <a:pPr algn="l" lvl="1" marL="254000" indent="-127000">
-              <a:lnSpc>
-                <a:spcPts val="1686"/>
-              </a:lnSpc>
-              <a:buSzPct val="100000"/>
-              <a:buChar char="●"/>
-            </a:pPr>
-            <a:r>
-              <a:rPr lang="en-US" sz="1222" dirty="0">
-                <a:solidFill>
-                  <a:srgbClr val="383F47"/>
-                </a:solidFill>
-                <a:latin typeface="Roboto" pitchFamily="34" charset="0"/>
-                <a:ea typeface="Roboto" pitchFamily="34" charset="-122"/>
-                <a:cs typeface="Roboto" pitchFamily="34" charset="-120"/>
-              </a:rPr>
-              <a:t>Effortlessly manage sharing and permissions with your team.</a:t>
-            </a:r>
-            <a:endParaRPr lang="en-US" sz="1222" dirty="0"/>
-          </a:p>
-          <a:p>
-            <a:pPr algn="l" lvl="1" marL="254000" indent="-127000">
-              <a:lnSpc>
-                <a:spcPts val="1686"/>
-              </a:lnSpc>
-              <a:buSzPct val="100000"/>
-              <a:buChar char="●"/>
-            </a:pPr>
-            <a:r>
-              <a:rPr lang="en-US" sz="1222" dirty="0">
-                <a:solidFill>
-                  <a:srgbClr val="383F47"/>
-                </a:solidFill>
-                <a:latin typeface="Roboto" pitchFamily="34" charset="0"/>
-                <a:ea typeface="Roboto" pitchFamily="34" charset="-122"/>
-                <a:cs typeface="Roboto" pitchFamily="34" charset="-120"/>
-              </a:rPr>
-              <a:t>Access your entire BioRender library at your fingertips.</a:t>
-            </a:r>
-            <a:endParaRPr lang="en-US" sz="1222" dirty="0"/>
-          </a:p>
-          <a:p>
-            <a:pPr algn="l" lvl="1" marL="254000" indent="-127000">
-              <a:lnSpc>
-                <a:spcPts val="1686"/>
-              </a:lnSpc>
-              <a:buSzPct val="100000"/>
-              <a:buChar char="●"/>
-            </a:pPr>
-            <a:r>
-              <a:rPr lang="en-US" sz="1222" dirty="0">
-                <a:solidFill>
-                  <a:srgbClr val="383F47"/>
-                </a:solidFill>
-                <a:latin typeface="Roboto" pitchFamily="34" charset="0"/>
-                <a:ea typeface="Roboto" pitchFamily="34" charset="-122"/>
-                <a:cs typeface="Roboto" pitchFamily="34" charset="-120"/>
-              </a:rPr>
-              <a:t>Need a transparent background? Toggle it on or off, anytime.</a:t>
-            </a:r>
-            <a:endParaRPr lang="en-US" sz="1222" dirty="0"/>
-          </a:p>
-          <a:p>
-            <a:pPr algn="l" indent="0" marL="0">
-              <a:lnSpc>
-                <a:spcPts val="1686"/>
-              </a:lnSpc>
-              <a:buNone/>
-            </a:pPr>
-            <a:endParaRPr lang="en-US" sz="1222" dirty="0"/>
-          </a:p>
-          <a:p>
-            <a:pPr algn="l" indent="0" marL="0">
-              <a:lnSpc>
-                <a:spcPts val="1686"/>
-              </a:lnSpc>
-              <a:buNone/>
-            </a:pPr>
-            <a:r>
-              <a:rPr lang="en-US" sz="1222" dirty="0">
-                <a:solidFill>
-                  <a:srgbClr val="383F47"/>
-                </a:solidFill>
-                <a:latin typeface="Roboto" pitchFamily="34" charset="0"/>
-                <a:ea typeface="Roboto" pitchFamily="34" charset="-122"/>
-                <a:cs typeface="Roboto" pitchFamily="34" charset="-120"/>
-              </a:rPr>
-              <a:t>BioRender for PowerPoint is hosted safely and securely in the Microsoft AppSource.</a:t>
-            </a:r>
-            <a:endParaRPr lang="en-US" sz="1222" dirty="0"/>
-          </a:p>
-        </p:txBody>
-      </p:sp>
-      <p:sp>
-        <p:nvSpPr>
-          <p:cNvPr id="9" name="Text 5"/>
-          <p:cNvSpPr/>
-          <p:nvPr/>
-        </p:nvSpPr>
-        <p:spPr>
-          <a:xfrm>
-            <a:off x="6261708" y="8974973"/>
-            <a:ext cx="1926679" cy="385336"/>
-          </a:xfrm>
-          <a:prstGeom prst="rect">
-            <a:avLst/>
-          </a:prstGeom>
-          <a:noFill/>
-          <a:ln/>
-        </p:spPr>
-        <p:txBody>
-          <a:bodyPr wrap="square" lIns="0" tIns="0" rIns="0" bIns="0" rtlCol="0" anchor="ctr"/>
-          <a:lstStyle/>
-          <a:p>
-            <a:pPr algn="ctr" indent="0" marL="0">
-              <a:buNone/>
-            </a:pPr>
-            <a:r>
-              <a:rPr lang="en-US" sz="1349" b="1" dirty="0">
-                <a:solidFill>
-                  <a:srgbClr val="085299"/>
-                </a:solidFill>
-                <a:latin typeface="Roboto" pitchFamily="34" charset="0"/>
-                <a:ea typeface="Roboto" pitchFamily="34" charset="-122"/>
-                <a:cs typeface="Roboto" pitchFamily="34" charset="-120"/>
-              </a:rPr>
-              <a:t>Get the add-in now:</a:t>
-            </a:r>
-            <a:endParaRPr lang="en-US" sz="1349" dirty="0"/>
-          </a:p>
-        </p:txBody>
-      </p:sp>
-      <p:sp>
-        <p:nvSpPr>
-          <p:cNvPr id="10" name="Text 6">
-            <a:hlinkClick r:id="rId7" tooltip=""/>
-          </p:cNvPr>
-          <p:cNvSpPr/>
-          <p:nvPr/>
-        </p:nvSpPr>
-        <p:spPr>
-          <a:xfrm>
-            <a:off x="5683704" y="9360309"/>
-            <a:ext cx="3082687" cy="770672"/>
-          </a:xfrm>
-          <a:prstGeom prst="rect">
-            <a:avLst/>
-          </a:prstGeom>
-          <a:noFill/>
-          <a:ln/>
-        </p:spPr>
-        <p:txBody>
-          <a:bodyPr wrap="square" lIns="0" tIns="0" rIns="0" bIns="0" rtlCol="0" anchor="t"/>
-          <a:lstStyle/>
-          <a:p>
-            <a:pPr algn="ctr" indent="0" marL="0">
-              <a:buNone/>
-            </a:pPr>
-            <a:r>
-              <a:rPr lang="en-US" sz="1011" u="sng" dirty="0">
-                <a:solidFill>
-                  <a:srgbClr val="085299"/>
-                </a:solidFill>
-                <a:latin typeface="Roboto" pitchFamily="34" charset="0"/>
-                <a:ea typeface="Roboto" pitchFamily="34" charset="-122"/>
-                <a:cs typeface="Roboto" pitchFamily="34" charset="-120"/>
-                <a:hlinkClick r:id="rId7" invalidUrl="" action="" tgtFrame="" tooltip="" history="1" highlightClick="0" endSnd="0">
-                  <a:extLst>
-                    <a:ext uri="{A12FA001-AC4F-418D-AE19-62706E023703}">
-                      <ahyp:hlinkClr xmlns:ahyp="http://schemas.microsoft.com/office/drawing/2018/hyperlinkcolor" val="tx"/>
-                    </a:ext>
-                  </a:extLst>
-                </a:hlinkClick>
-              </a:rPr>
-              <a:t>https://appsource.microsoft.com/en-us/product/office/wa200006038?src=product&amp;mktcmpid=pptx_export</a:t>
-            </a:r>
-            <a:endParaRPr lang="en-US" sz="1011" dirty="0"/>
-          </a:p>
-        </p:txBody>
-      </p:sp>
-    </p:spTree>
-  </p:cSld>
-  <p:clrMapOvr>
-    <a:masterClrMapping/>
-  </p:clrMapOvr>
-</p:sld>
-</file>
-
-<file path=ppt/tags/tag1-1.xml><?xml version="1.0" encoding="utf-8"?>
+<file path=ppt/tags/tag1.xml><?xml version="1.0" encoding="utf-8"?>
 <p:tagLst xmlns:a="http://schemas.openxmlformats.org/drawingml/2006/main" xmlns:r="http://schemas.openxmlformats.org/officeDocument/2006/relationships" xmlns:p="http://schemas.openxmlformats.org/presentationml/2006/main">
   <p:tag name="EXPORTMETHOD" val="pptx_export_from_biorender"/>
   <p:tag name="ILLUSTRATIONID" val="6a165fae96a91fe4bad0ed31"/>
@@ -2490,7 +1481,7 @@
 </p:tagLst>
 </file>
 
-<file path=ppt/tags/tag1-10.xml><?xml version="1.0" encoding="utf-8"?>
+<file path=ppt/tags/tag10.xml><?xml version="1.0" encoding="utf-8"?>
 <p:tagLst xmlns:a="http://schemas.openxmlformats.org/drawingml/2006/main" xmlns:r="http://schemas.openxmlformats.org/officeDocument/2006/relationships" xmlns:p="http://schemas.openxmlformats.org/presentationml/2006/main">
   <p:tag name="ID" val="6a165fae96a91fe4bad0ed31"/>
   <p:tag name="FIGURESLIDEID" val="d8b6af00-a9ac-4faf-bc1f-d7d7462cc7d7"/>
@@ -2505,7 +1496,7 @@
 </p:tagLst>
 </file>
 
-<file path=ppt/tags/tag1-11.xml><?xml version="1.0" encoding="utf-8"?>
+<file path=ppt/tags/tag11.xml><?xml version="1.0" encoding="utf-8"?>
 <p:tagLst xmlns:a="http://schemas.openxmlformats.org/drawingml/2006/main" xmlns:r="http://schemas.openxmlformats.org/officeDocument/2006/relationships" xmlns:p="http://schemas.openxmlformats.org/presentationml/2006/main">
   <p:tag name="ID" val="6a165fae96a91fe4bad0ed31"/>
   <p:tag name="FIGURESLIDEID" val="d8b6af00-a9ac-4faf-bc1f-d7d7462cc7d7"/>
@@ -2520,7 +1511,7 @@
 </p:tagLst>
 </file>
 
-<file path=ppt/tags/tag1-12.xml><?xml version="1.0" encoding="utf-8"?>
+<file path=ppt/tags/tag12.xml><?xml version="1.0" encoding="utf-8"?>
 <p:tagLst xmlns:a="http://schemas.openxmlformats.org/drawingml/2006/main" xmlns:r="http://schemas.openxmlformats.org/officeDocument/2006/relationships" xmlns:p="http://schemas.openxmlformats.org/presentationml/2006/main">
   <p:tag name="ID" val="6a165fae96a91fe4bad0ed31"/>
   <p:tag name="FIGURESLIDEID" val="d8b6af00-a9ac-4faf-bc1f-d7d7462cc7d7"/>
@@ -2535,7 +1526,7 @@
 </p:tagLst>
 </file>
 
-<file path=ppt/tags/tag1-13.xml><?xml version="1.0" encoding="utf-8"?>
+<file path=ppt/tags/tag13.xml><?xml version="1.0" encoding="utf-8"?>
 <p:tagLst xmlns:a="http://schemas.openxmlformats.org/drawingml/2006/main" xmlns:r="http://schemas.openxmlformats.org/officeDocument/2006/relationships" xmlns:p="http://schemas.openxmlformats.org/presentationml/2006/main">
   <p:tag name="ID" val="6a165fae96a91fe4bad0ed31"/>
   <p:tag name="FIGURESLIDEID" val="d8b6af00-a9ac-4faf-bc1f-d7d7462cc7d7"/>
@@ -2550,7 +1541,7 @@
 </p:tagLst>
 </file>
 
-<file path=ppt/tags/tag1-14.xml><?xml version="1.0" encoding="utf-8"?>
+<file path=ppt/tags/tag14.xml><?xml version="1.0" encoding="utf-8"?>
 <p:tagLst xmlns:a="http://schemas.openxmlformats.org/drawingml/2006/main" xmlns:r="http://schemas.openxmlformats.org/officeDocument/2006/relationships" xmlns:p="http://schemas.openxmlformats.org/presentationml/2006/main">
   <p:tag name="ID" val="6a165fae96a91fe4bad0ed31"/>
   <p:tag name="FIGURESLIDEID" val="d8b6af00-a9ac-4faf-bc1f-d7d7462cc7d7"/>
@@ -2565,7 +1556,7 @@
 </p:tagLst>
 </file>
 
-<file path=ppt/tags/tag1-15.xml><?xml version="1.0" encoding="utf-8"?>
+<file path=ppt/tags/tag15.xml><?xml version="1.0" encoding="utf-8"?>
 <p:tagLst xmlns:a="http://schemas.openxmlformats.org/drawingml/2006/main" xmlns:r="http://schemas.openxmlformats.org/officeDocument/2006/relationships" xmlns:p="http://schemas.openxmlformats.org/presentationml/2006/main">
   <p:tag name="ID" val="6a165fae96a91fe4bad0ed31"/>
   <p:tag name="FIGURESLIDEID" val="d8b6af00-a9ac-4faf-bc1f-d7d7462cc7d7"/>
@@ -2580,7 +1571,7 @@
 </p:tagLst>
 </file>
 
-<file path=ppt/tags/tag1-16.xml><?xml version="1.0" encoding="utf-8"?>
+<file path=ppt/tags/tag16.xml><?xml version="1.0" encoding="utf-8"?>
 <p:tagLst xmlns:a="http://schemas.openxmlformats.org/drawingml/2006/main" xmlns:r="http://schemas.openxmlformats.org/officeDocument/2006/relationships" xmlns:p="http://schemas.openxmlformats.org/presentationml/2006/main">
   <p:tag name="ID" val="6a165fae96a91fe4bad0ed31"/>
   <p:tag name="FIGURESLIDEID" val="d8b6af00-a9ac-4faf-bc1f-d7d7462cc7d7"/>
@@ -2595,7 +1586,7 @@
 </p:tagLst>
 </file>
 
-<file path=ppt/tags/tag1-17.xml><?xml version="1.0" encoding="utf-8"?>
+<file path=ppt/tags/tag17.xml><?xml version="1.0" encoding="utf-8"?>
 <p:tagLst xmlns:a="http://schemas.openxmlformats.org/drawingml/2006/main" xmlns:r="http://schemas.openxmlformats.org/officeDocument/2006/relationships" xmlns:p="http://schemas.openxmlformats.org/presentationml/2006/main">
   <p:tag name="ID" val="6a165fae96a91fe4bad0ed31"/>
   <p:tag name="FIGURESLIDEID" val="d8b6af00-a9ac-4faf-bc1f-d7d7462cc7d7"/>
@@ -2610,7 +1601,7 @@
 </p:tagLst>
 </file>
 
-<file path=ppt/tags/tag1-18.xml><?xml version="1.0" encoding="utf-8"?>
+<file path=ppt/tags/tag18.xml><?xml version="1.0" encoding="utf-8"?>
 <p:tagLst xmlns:a="http://schemas.openxmlformats.org/drawingml/2006/main" xmlns:r="http://schemas.openxmlformats.org/officeDocument/2006/relationships" xmlns:p="http://schemas.openxmlformats.org/presentationml/2006/main">
   <p:tag name="ID" val="6a165fae96a91fe4bad0ed31"/>
   <p:tag name="FIGURESLIDEID" val="d8b6af00-a9ac-4faf-bc1f-d7d7462cc7d7"/>
@@ -2625,7 +1616,7 @@
 </p:tagLst>
 </file>
 
-<file path=ppt/tags/tag1-19.xml><?xml version="1.0" encoding="utf-8"?>
+<file path=ppt/tags/tag19.xml><?xml version="1.0" encoding="utf-8"?>
 <p:tagLst xmlns:a="http://schemas.openxmlformats.org/drawingml/2006/main" xmlns:r="http://schemas.openxmlformats.org/officeDocument/2006/relationships" xmlns:p="http://schemas.openxmlformats.org/presentationml/2006/main">
   <p:tag name="ID" val="6a165fae96a91fe4bad0ed31"/>
   <p:tag name="FIGURESLIDEID" val="d8b6af00-a9ac-4faf-bc1f-d7d7462cc7d7"/>
@@ -2640,7 +1631,7 @@
 </p:tagLst>
 </file>
 
-<file path=ppt/tags/tag1-2.xml><?xml version="1.0" encoding="utf-8"?>
+<file path=ppt/tags/tag2.xml><?xml version="1.0" encoding="utf-8"?>
 <p:tagLst xmlns:a="http://schemas.openxmlformats.org/drawingml/2006/main" xmlns:r="http://schemas.openxmlformats.org/officeDocument/2006/relationships" xmlns:p="http://schemas.openxmlformats.org/presentationml/2006/main">
   <p:tag name="ID" val="6a165fae96a91fe4bad0ed31"/>
   <p:tag name="FIGURESLIDEID" val="d8b6af00-a9ac-4faf-bc1f-d7d7462cc7d7"/>
@@ -2655,7 +1646,7 @@
 </p:tagLst>
 </file>
 
-<file path=ppt/tags/tag1-20.xml><?xml version="1.0" encoding="utf-8"?>
+<file path=ppt/tags/tag20.xml><?xml version="1.0" encoding="utf-8"?>
 <p:tagLst xmlns:a="http://schemas.openxmlformats.org/drawingml/2006/main" xmlns:r="http://schemas.openxmlformats.org/officeDocument/2006/relationships" xmlns:p="http://schemas.openxmlformats.org/presentationml/2006/main">
   <p:tag name="ID" val="6a165fae96a91fe4bad0ed31"/>
   <p:tag name="FIGURESLIDEID" val="d8b6af00-a9ac-4faf-bc1f-d7d7462cc7d7"/>
@@ -2670,7 +1661,7 @@
 </p:tagLst>
 </file>
 
-<file path=ppt/tags/tag1-21.xml><?xml version="1.0" encoding="utf-8"?>
+<file path=ppt/tags/tag21.xml><?xml version="1.0" encoding="utf-8"?>
 <p:tagLst xmlns:a="http://schemas.openxmlformats.org/drawingml/2006/main" xmlns:r="http://schemas.openxmlformats.org/officeDocument/2006/relationships" xmlns:p="http://schemas.openxmlformats.org/presentationml/2006/main">
   <p:tag name="ID" val="6a165fae96a91fe4bad0ed31"/>
   <p:tag name="FIGURESLIDEID" val="d8b6af00-a9ac-4faf-bc1f-d7d7462cc7d7"/>
@@ -2685,7 +1676,7 @@
 </p:tagLst>
 </file>
 
-<file path=ppt/tags/tag1-22.xml><?xml version="1.0" encoding="utf-8"?>
+<file path=ppt/tags/tag22.xml><?xml version="1.0" encoding="utf-8"?>
 <p:tagLst xmlns:a="http://schemas.openxmlformats.org/drawingml/2006/main" xmlns:r="http://schemas.openxmlformats.org/officeDocument/2006/relationships" xmlns:p="http://schemas.openxmlformats.org/presentationml/2006/main">
   <p:tag name="ID" val="6a165fae96a91fe4bad0ed31"/>
   <p:tag name="FIGURESLIDEID" val="d8b6af00-a9ac-4faf-bc1f-d7d7462cc7d7"/>
@@ -2700,7 +1691,7 @@
 </p:tagLst>
 </file>
 
-<file path=ppt/tags/tag1-23.xml><?xml version="1.0" encoding="utf-8"?>
+<file path=ppt/tags/tag23.xml><?xml version="1.0" encoding="utf-8"?>
 <p:tagLst xmlns:a="http://schemas.openxmlformats.org/drawingml/2006/main" xmlns:r="http://schemas.openxmlformats.org/officeDocument/2006/relationships" xmlns:p="http://schemas.openxmlformats.org/presentationml/2006/main">
   <p:tag name="ID" val="6a165fae96a91fe4bad0ed31"/>
   <p:tag name="FIGURESLIDEID" val="d8b6af00-a9ac-4faf-bc1f-d7d7462cc7d7"/>
@@ -2715,7 +1706,7 @@
 </p:tagLst>
 </file>
 
-<file path=ppt/tags/tag1-24.xml><?xml version="1.0" encoding="utf-8"?>
+<file path=ppt/tags/tag24.xml><?xml version="1.0" encoding="utf-8"?>
 <p:tagLst xmlns:a="http://schemas.openxmlformats.org/drawingml/2006/main" xmlns:r="http://schemas.openxmlformats.org/officeDocument/2006/relationships" xmlns:p="http://schemas.openxmlformats.org/presentationml/2006/main">
   <p:tag name="ID" val="6a165fae96a91fe4bad0ed31"/>
   <p:tag name="FIGURESLIDEID" val="d8b6af00-a9ac-4faf-bc1f-d7d7462cc7d7"/>
@@ -2730,7 +1721,7 @@
 </p:tagLst>
 </file>
 
-<file path=ppt/tags/tag1-25.xml><?xml version="1.0" encoding="utf-8"?>
+<file path=ppt/tags/tag25.xml><?xml version="1.0" encoding="utf-8"?>
 <p:tagLst xmlns:a="http://schemas.openxmlformats.org/drawingml/2006/main" xmlns:r="http://schemas.openxmlformats.org/officeDocument/2006/relationships" xmlns:p="http://schemas.openxmlformats.org/presentationml/2006/main">
   <p:tag name="ID" val="6a165fae96a91fe4bad0ed31"/>
   <p:tag name="FIGURESLIDEID" val="d8b6af00-a9ac-4faf-bc1f-d7d7462cc7d7"/>
@@ -2745,7 +1736,7 @@
 </p:tagLst>
 </file>
 
-<file path=ppt/tags/tag1-3.xml><?xml version="1.0" encoding="utf-8"?>
+<file path=ppt/tags/tag3.xml><?xml version="1.0" encoding="utf-8"?>
 <p:tagLst xmlns:a="http://schemas.openxmlformats.org/drawingml/2006/main" xmlns:r="http://schemas.openxmlformats.org/officeDocument/2006/relationships" xmlns:p="http://schemas.openxmlformats.org/presentationml/2006/main">
   <p:tag name="ID" val="6a165fae96a91fe4bad0ed31"/>
   <p:tag name="FIGURESLIDEID" val="d8b6af00-a9ac-4faf-bc1f-d7d7462cc7d7"/>
@@ -2760,7 +1751,7 @@
 </p:tagLst>
 </file>
 
-<file path=ppt/tags/tag1-4.xml><?xml version="1.0" encoding="utf-8"?>
+<file path=ppt/tags/tag4.xml><?xml version="1.0" encoding="utf-8"?>
 <p:tagLst xmlns:a="http://schemas.openxmlformats.org/drawingml/2006/main" xmlns:r="http://schemas.openxmlformats.org/officeDocument/2006/relationships" xmlns:p="http://schemas.openxmlformats.org/presentationml/2006/main">
   <p:tag name="ID" val="6a165fae96a91fe4bad0ed31"/>
   <p:tag name="FIGURESLIDEID" val="d8b6af00-a9ac-4faf-bc1f-d7d7462cc7d7"/>
@@ -2775,7 +1766,7 @@
 </p:tagLst>
 </file>
 
-<file path=ppt/tags/tag1-5.xml><?xml version="1.0" encoding="utf-8"?>
+<file path=ppt/tags/tag5.xml><?xml version="1.0" encoding="utf-8"?>
 <p:tagLst xmlns:a="http://schemas.openxmlformats.org/drawingml/2006/main" xmlns:r="http://schemas.openxmlformats.org/officeDocument/2006/relationships" xmlns:p="http://schemas.openxmlformats.org/presentationml/2006/main">
   <p:tag name="ID" val="6a165fae96a91fe4bad0ed31"/>
   <p:tag name="FIGURESLIDEID" val="d8b6af00-a9ac-4faf-bc1f-d7d7462cc7d7"/>
@@ -2790,7 +1781,7 @@
 </p:tagLst>
 </file>
 
-<file path=ppt/tags/tag1-6.xml><?xml version="1.0" encoding="utf-8"?>
+<file path=ppt/tags/tag6.xml><?xml version="1.0" encoding="utf-8"?>
 <p:tagLst xmlns:a="http://schemas.openxmlformats.org/drawingml/2006/main" xmlns:r="http://schemas.openxmlformats.org/officeDocument/2006/relationships" xmlns:p="http://schemas.openxmlformats.org/presentationml/2006/main">
   <p:tag name="ID" val="6a165fae96a91fe4bad0ed31"/>
   <p:tag name="FIGURESLIDEID" val="d8b6af00-a9ac-4faf-bc1f-d7d7462cc7d7"/>
@@ -2805,7 +1796,7 @@
 </p:tagLst>
 </file>
 
-<file path=ppt/tags/tag1-7.xml><?xml version="1.0" encoding="utf-8"?>
+<file path=ppt/tags/tag7.xml><?xml version="1.0" encoding="utf-8"?>
 <p:tagLst xmlns:a="http://schemas.openxmlformats.org/drawingml/2006/main" xmlns:r="http://schemas.openxmlformats.org/officeDocument/2006/relationships" xmlns:p="http://schemas.openxmlformats.org/presentationml/2006/main">
   <p:tag name="ID" val="6a165fae96a91fe4bad0ed31"/>
   <p:tag name="FIGURESLIDEID" val="d8b6af00-a9ac-4faf-bc1f-d7d7462cc7d7"/>
@@ -2820,7 +1811,7 @@
 </p:tagLst>
 </file>
 
-<file path=ppt/tags/tag1-8.xml><?xml version="1.0" encoding="utf-8"?>
+<file path=ppt/tags/tag8.xml><?xml version="1.0" encoding="utf-8"?>
 <p:tagLst xmlns:a="http://schemas.openxmlformats.org/drawingml/2006/main" xmlns:r="http://schemas.openxmlformats.org/officeDocument/2006/relationships" xmlns:p="http://schemas.openxmlformats.org/presentationml/2006/main">
   <p:tag name="ID" val="6a165fae96a91fe4bad0ed31"/>
   <p:tag name="FIGURESLIDEID" val="d8b6af00-a9ac-4faf-bc1f-d7d7462cc7d7"/>
@@ -2835,7 +1826,7 @@
 </p:tagLst>
 </file>
 
-<file path=ppt/tags/tag1-9.xml><?xml version="1.0" encoding="utf-8"?>
+<file path=ppt/tags/tag9.xml><?xml version="1.0" encoding="utf-8"?>
 <p:tagLst xmlns:a="http://schemas.openxmlformats.org/drawingml/2006/main" xmlns:r="http://schemas.openxmlformats.org/officeDocument/2006/relationships" xmlns:p="http://schemas.openxmlformats.org/presentationml/2006/main">
   <p:tag name="ID" val="6a165fae96a91fe4bad0ed31"/>
   <p:tag name="FIGURESLIDEID" val="d8b6af00-a9ac-4faf-bc1f-d7d7462cc7d7"/>
@@ -3143,4 +2134,319 @@
     </a:ext>
   </a:extLst>
 </a:theme>
+</file>
+
+<file path=ppt/theme/theme2.xml><?xml version="1.0" encoding="utf-8"?>
+<a:theme xmlns:a="http://schemas.openxmlformats.org/drawingml/2006/main" name="Office Theme">
+  <a:themeElements>
+    <a:clrScheme name="Office">
+      <a:dk1>
+        <a:sysClr val="windowText" lastClr="000000"/>
+      </a:dk1>
+      <a:lt1>
+        <a:sysClr val="window" lastClr="FFFFFF"/>
+      </a:lt1>
+      <a:dk2>
+        <a:srgbClr val="0E2841"/>
+      </a:dk2>
+      <a:lt2>
+        <a:srgbClr val="E8E8E8"/>
+      </a:lt2>
+      <a:accent1>
+        <a:srgbClr val="156082"/>
+      </a:accent1>
+      <a:accent2>
+        <a:srgbClr val="E97132"/>
+      </a:accent2>
+      <a:accent3>
+        <a:srgbClr val="196B24"/>
+      </a:accent3>
+      <a:accent4>
+        <a:srgbClr val="0F9ED5"/>
+      </a:accent4>
+      <a:accent5>
+        <a:srgbClr val="A02B93"/>
+      </a:accent5>
+      <a:accent6>
+        <a:srgbClr val="4EA72E"/>
+      </a:accent6>
+      <a:hlink>
+        <a:srgbClr val="467886"/>
+      </a:hlink>
+      <a:folHlink>
+        <a:srgbClr val="96607D"/>
+      </a:folHlink>
+    </a:clrScheme>
+    <a:fontScheme name="Office">
+      <a:majorFont>
+        <a:latin typeface="Aptos Display" panose="02110004020202020204"/>
+        <a:ea typeface=""/>
+        <a:cs typeface=""/>
+        <a:font script="Jpan" typeface="游ゴシック Light"/>
+        <a:font script="Hang" typeface="맑은 고딕"/>
+        <a:font script="Hans" typeface="等线 Light"/>
+        <a:font script="Hant" typeface="新細明體"/>
+        <a:font script="Arab" typeface="Times New Roman"/>
+        <a:font script="Hebr" typeface="Times New Roman"/>
+        <a:font script="Thai" typeface="Angsana New"/>
+        <a:font script="Ethi" typeface="Nyala"/>
+        <a:font script="Beng" typeface="Vrinda"/>
+        <a:font script="Gujr" typeface="Shruti"/>
+        <a:font script="Khmr" typeface="MoolBoran"/>
+        <a:font script="Knda" typeface="Tunga"/>
+        <a:font script="Guru" typeface="Raavi"/>
+        <a:font script="Cans" typeface="Euphemia"/>
+        <a:font script="Cher" typeface="Plantagenet Cherokee"/>
+        <a:font script="Yiii" typeface="Microsoft Yi Baiti"/>
+        <a:font script="Tibt" typeface="Microsoft Himalaya"/>
+        <a:font script="Thaa" typeface="MV Boli"/>
+        <a:font script="Deva" typeface="Mangal"/>
+        <a:font script="Telu" typeface="Gautami"/>
+        <a:font script="Taml" typeface="Latha"/>
+        <a:font script="Syrc" typeface="Estrangelo Edessa"/>
+        <a:font script="Orya" typeface="Kalinga"/>
+        <a:font script="Mlym" typeface="Kartika"/>
+        <a:font script="Laoo" typeface="DokChampa"/>
+        <a:font script="Sinh" typeface="Iskoola Pota"/>
+        <a:font script="Mong" typeface="Mongolian Baiti"/>
+        <a:font script="Viet" typeface="Times New Roman"/>
+        <a:font script="Uigh" typeface="Microsoft Uighur"/>
+        <a:font script="Geor" typeface="Sylfaen"/>
+        <a:font script="Armn" typeface="Arial"/>
+        <a:font script="Bugi" typeface="Leelawadee UI"/>
+        <a:font script="Bopo" typeface="Microsoft JhengHei"/>
+        <a:font script="Java" typeface="Javanese Text"/>
+        <a:font script="Lisu" typeface="Segoe UI"/>
+        <a:font script="Mymr" typeface="Myanmar Text"/>
+        <a:font script="Nkoo" typeface="Ebrima"/>
+        <a:font script="Olck" typeface="Nirmala UI"/>
+        <a:font script="Osma" typeface="Ebrima"/>
+        <a:font script="Phag" typeface="Phagspa"/>
+        <a:font script="Syrn" typeface="Estrangelo Edessa"/>
+        <a:font script="Syrj" typeface="Estrangelo Edessa"/>
+        <a:font script="Syre" typeface="Estrangelo Edessa"/>
+        <a:font script="Sora" typeface="Nirmala UI"/>
+        <a:font script="Tale" typeface="Microsoft Tai Le"/>
+        <a:font script="Talu" typeface="Microsoft New Tai Lue"/>
+        <a:font script="Tfng" typeface="Ebrima"/>
+      </a:majorFont>
+      <a:minorFont>
+        <a:latin typeface="Aptos" panose="02110004020202020204"/>
+        <a:ea typeface=""/>
+        <a:cs typeface=""/>
+        <a:font script="Jpan" typeface="游ゴシック"/>
+        <a:font script="Hang" typeface="맑은 고딕"/>
+        <a:font script="Hans" typeface="等线"/>
+        <a:font script="Hant" typeface="新細明體"/>
+        <a:font script="Arab" typeface="Arial"/>
+        <a:font script="Hebr" typeface="Arial"/>
+        <a:font script="Thai" typeface="Cordia New"/>
+        <a:font script="Ethi" typeface="Nyala"/>
+        <a:font script="Beng" typeface="Vrinda"/>
+        <a:font script="Gujr" typeface="Shruti"/>
+        <a:font script="Khmr" typeface="DaunPenh"/>
+        <a:font script="Knda" typeface="Tunga"/>
+        <a:font script="Guru" typeface="Raavi"/>
+        <a:font script="Cans" typeface="Euphemia"/>
+        <a:font script="Cher" typeface="Plantagenet Cherokee"/>
+        <a:font script="Yiii" typeface="Microsoft Yi Baiti"/>
+        <a:font script="Tibt" typeface="Microsoft Himalaya"/>
+        <a:font script="Thaa" typeface="MV Boli"/>
+        <a:font script="Deva" typeface="Mangal"/>
+        <a:font script="Telu" typeface="Gautami"/>
+        <a:font script="Taml" typeface="Latha"/>
+        <a:font script="Syrc" typeface="Estrangelo Edessa"/>
+        <a:font script="Orya" typeface="Kalinga"/>
+        <a:font script="Mlym" typeface="Kartika"/>
+        <a:font script="Laoo" typeface="DokChampa"/>
+        <a:font script="Sinh" typeface="Iskoola Pota"/>
+        <a:font script="Mong" typeface="Mongolian Baiti"/>
+        <a:font script="Viet" typeface="Arial"/>
+        <a:font script="Uigh" typeface="Microsoft Uighur"/>
+        <a:font script="Geor" typeface="Sylfaen"/>
+        <a:font script="Armn" typeface="Arial"/>
+        <a:font script="Bugi" typeface="Leelawadee UI"/>
+        <a:font script="Bopo" typeface="Microsoft JhengHei"/>
+        <a:font script="Java" typeface="Javanese Text"/>
+        <a:font script="Lisu" typeface="Segoe UI"/>
+        <a:font script="Mymr" typeface="Myanmar Text"/>
+        <a:font script="Nkoo" typeface="Ebrima"/>
+        <a:font script="Olck" typeface="Nirmala UI"/>
+        <a:font script="Osma" typeface="Ebrima"/>
+        <a:font script="Phag" typeface="Phagspa"/>
+        <a:font script="Syrn" typeface="Estrangelo Edessa"/>
+        <a:font script="Syrj" typeface="Estrangelo Edessa"/>
+        <a:font script="Syre" typeface="Estrangelo Edessa"/>
+        <a:font script="Sora" typeface="Nirmala UI"/>
+        <a:font script="Tale" typeface="Microsoft Tai Le"/>
+        <a:font script="Talu" typeface="Microsoft New Tai Lue"/>
+        <a:font script="Tfng" typeface="Ebrima"/>
+      </a:minorFont>
+    </a:fontScheme>
+    <a:fmtScheme name="Office">
+      <a:fillStyleLst>
+        <a:solidFill>
+          <a:schemeClr val="phClr"/>
+        </a:solidFill>
+        <a:gradFill rotWithShape="1">
+          <a:gsLst>
+            <a:gs pos="0">
+              <a:schemeClr val="phClr">
+                <a:lumMod val="110000"/>
+                <a:satMod val="105000"/>
+                <a:tint val="67000"/>
+              </a:schemeClr>
+            </a:gs>
+            <a:gs pos="50000">
+              <a:schemeClr val="phClr">
+                <a:lumMod val="105000"/>
+                <a:satMod val="103000"/>
+                <a:tint val="73000"/>
+              </a:schemeClr>
+            </a:gs>
+            <a:gs pos="100000">
+              <a:schemeClr val="phClr">
+                <a:lumMod val="105000"/>
+                <a:satMod val="109000"/>
+                <a:tint val="81000"/>
+              </a:schemeClr>
+            </a:gs>
+          </a:gsLst>
+          <a:lin ang="5400000" scaled="0"/>
+        </a:gradFill>
+        <a:gradFill rotWithShape="1">
+          <a:gsLst>
+            <a:gs pos="0">
+              <a:schemeClr val="phClr">
+                <a:satMod val="103000"/>
+                <a:lumMod val="102000"/>
+                <a:tint val="94000"/>
+              </a:schemeClr>
+            </a:gs>
+            <a:gs pos="50000">
+              <a:schemeClr val="phClr">
+                <a:satMod val="110000"/>
+                <a:lumMod val="100000"/>
+                <a:shade val="100000"/>
+              </a:schemeClr>
+            </a:gs>
+            <a:gs pos="100000">
+              <a:schemeClr val="phClr">
+                <a:lumMod val="99000"/>
+                <a:satMod val="120000"/>
+                <a:shade val="78000"/>
+              </a:schemeClr>
+            </a:gs>
+          </a:gsLst>
+          <a:lin ang="5400000" scaled="0"/>
+        </a:gradFill>
+      </a:fillStyleLst>
+      <a:lnStyleLst>
+        <a:ln w="12700" cap="flat" cmpd="sng" algn="ctr">
+          <a:solidFill>
+            <a:schemeClr val="phClr"/>
+          </a:solidFill>
+          <a:prstDash val="solid"/>
+          <a:miter lim="800000"/>
+        </a:ln>
+        <a:ln w="19050" cap="flat" cmpd="sng" algn="ctr">
+          <a:solidFill>
+            <a:schemeClr val="phClr"/>
+          </a:solidFill>
+          <a:prstDash val="solid"/>
+          <a:miter lim="800000"/>
+        </a:ln>
+        <a:ln w="25400" cap="flat" cmpd="sng" algn="ctr">
+          <a:solidFill>
+            <a:schemeClr val="phClr"/>
+          </a:solidFill>
+          <a:prstDash val="solid"/>
+          <a:miter lim="800000"/>
+        </a:ln>
+      </a:lnStyleLst>
+      <a:effectStyleLst>
+        <a:effectStyle>
+          <a:effectLst/>
+        </a:effectStyle>
+        <a:effectStyle>
+          <a:effectLst/>
+        </a:effectStyle>
+        <a:effectStyle>
+          <a:effectLst>
+            <a:outerShdw blurRad="57150" dist="19050" dir="5400000" algn="ctr" rotWithShape="0">
+              <a:srgbClr val="000000">
+                <a:alpha val="63000"/>
+              </a:srgbClr>
+            </a:outerShdw>
+          </a:effectLst>
+        </a:effectStyle>
+      </a:effectStyleLst>
+      <a:bgFillStyleLst>
+        <a:solidFill>
+          <a:schemeClr val="phClr"/>
+        </a:solidFill>
+        <a:solidFill>
+          <a:schemeClr val="phClr">
+            <a:tint val="95000"/>
+            <a:satMod val="170000"/>
+          </a:schemeClr>
+        </a:solidFill>
+        <a:gradFill rotWithShape="1">
+          <a:gsLst>
+            <a:gs pos="0">
+              <a:schemeClr val="phClr">
+                <a:tint val="93000"/>
+                <a:satMod val="150000"/>
+                <a:shade val="98000"/>
+                <a:lumMod val="102000"/>
+              </a:schemeClr>
+            </a:gs>
+            <a:gs pos="50000">
+              <a:schemeClr val="phClr">
+                <a:tint val="98000"/>
+                <a:satMod val="130000"/>
+                <a:shade val="90000"/>
+                <a:lumMod val="103000"/>
+              </a:schemeClr>
+            </a:gs>
+            <a:gs pos="100000">
+              <a:schemeClr val="phClr">
+                <a:shade val="63000"/>
+                <a:satMod val="120000"/>
+              </a:schemeClr>
+            </a:gs>
+          </a:gsLst>
+          <a:lin ang="5400000" scaled="0"/>
+        </a:gradFill>
+      </a:bgFillStyleLst>
+    </a:fmtScheme>
+  </a:themeElements>
+  <a:objectDefaults>
+    <a:lnDef>
+      <a:spPr/>
+      <a:bodyPr/>
+      <a:lstStyle/>
+      <a:style>
+        <a:lnRef idx="2">
+          <a:schemeClr val="accent1"/>
+        </a:lnRef>
+        <a:fillRef idx="0">
+          <a:schemeClr val="accent1"/>
+        </a:fillRef>
+        <a:effectRef idx="1">
+          <a:schemeClr val="accent1"/>
+        </a:effectRef>
+        <a:fontRef idx="minor">
+          <a:schemeClr val="tx1"/>
+        </a:fontRef>
+      </a:style>
+    </a:lnDef>
+  </a:objectDefaults>
+  <a:extraClrSchemeLst/>
+  <a:extLst>
+    <a:ext uri="{05A4C25C-085E-4340-85A3-A5531E510DB2}">
+      <thm15:themeFamily xmlns:thm15="http://schemas.microsoft.com/office/thememl/2012/main" name="Office Theme" id="{2E142A2C-CD16-42D6-873A-C26D2A0506FA}" vid="{1BDDFF52-6CD6-40A5-AB3C-68EB2F1E4D0A}"/>
+    </a:ext>
+  </a:extLst>
+</a:theme>
 </file>